--- a/assets/figures-editable/c1-c2/c2-e03.pptx
+++ b/assets/figures-editable/c1-c2/c2-e03.pptx
@@ -7,7 +7,7 @@
   <p:sldIdLst>
     <p:sldId id="256" r:id="rId7"/>
   </p:sldIdLst>
-  <p:sldSz cx="11948160" cy="7924799" type="screen4x3"/>
+  <p:sldSz cx="12191695" cy="6858000" type="screen4x3"/>
   <p:notesSz cx="6858000" cy="9144000"/>
   <p:defaultTextStyle>
     <a:defPPr>
@@ -3098,14 +3098,14 @@
       <p:grpSpPr/>
       <p:sp>
         <p:nvSpPr>
-          <p:cNvPr id="2" name="text1" descr="sci-ppt:C2-E03-001"/>
+          <p:cNvPr id="2" name="C2-E03 text 0" descr="sci-ppt:o000"/>
           <p:cNvSpPr txBox="1"/>
           <p:nvPr/>
         </p:nvSpPr>
         <p:spPr>
           <a:xfrm>
-            <a:off x="316992" y="268224"/>
-            <a:ext cx="11277600" cy="359054"/>
+            <a:off x="274320" y="118872"/>
+            <a:ext cx="11612880" cy="340105"/>
           </a:xfrm>
           <a:prstGeom prst="rect">
             <a:avLst/>
@@ -3114,7 +3114,7 @@
           <a:effectLst/>
         </p:spPr>
         <p:txBody>
-          <a:bodyPr wrap="none" lIns="27432" rIns="27432" tIns="18288" bIns="18288" anchor="ctr">
+          <a:bodyPr wrap="none" lIns="18288" rIns="18288" tIns="18288" bIns="18288" anchor="t">
             <a:spAutoFit/>
           </a:bodyPr>
           <a:lstStyle/>
@@ -3125,111 +3125,59 @@
               </a:spcAft>
             </a:pPr>
             <a:r>
-              <a:rPr sz="1823" b="0" i="0">
+              <a:rPr sz="1900" b="1" i="0">
                 <a:solidFill>
                   <a:srgbClr val="8EDBD4"/>
                 </a:solidFill>
                 <a:latin typeface="Arial"/>
               </a:rPr>
-              <a:t>C2-E03 | Physical-variable diagram</a:t>
-            </a:r>
-          </a:p>
-        </p:txBody>
-      </p:sp>
-      <p:sp>
-        <p:nvSpPr>
-          <p:cNvPr id="3" name="ellipse2" descr="sci-ppt:C2-E03-002"/>
+              <a:t>C2-E03 · Derived interception fraction</a:t>
+            </a:r>
+          </a:p>
+        </p:txBody>
+      </p:sp>
+      <p:sp>
+        <p:nvSpPr>
+          <p:cNvPr id="3" name="C2-E03 round_rect 1" descr="sci-ppt:o001"/>
           <p:cNvSpPr/>
           <p:nvPr/>
         </p:nvSpPr>
         <p:spPr>
           <a:xfrm>
-            <a:off x="1402080" y="1341120"/>
-            <a:ext cx="2560320" cy="2560320"/>
-          </a:xfrm>
-          <a:prstGeom prst="ellipse">
-            <a:avLst/>
-          </a:prstGeom>
-          <a:noFill/>
-          <a:ln w="21590">
-            <a:solidFill>
-              <a:srgbClr val="B4C7D2"/>
-            </a:solidFill>
-          </a:ln>
-          <a:effectLst/>
-        </p:spPr>
-        <p:txBody>
-          <a:bodyPr rtlCol="0" anchor="ctr"/>
-          <a:lstStyle/>
-          <a:p>
-            <a:pPr algn="ctr"/>
-          </a:p>
-        </p:txBody>
-      </p:sp>
-      <p:sp>
-        <p:nvSpPr>
-          <p:cNvPr id="4" name="ellipse3" descr="sci-ppt:C2-E03-003"/>
-          <p:cNvSpPr/>
-          <p:nvPr/>
-        </p:nvSpPr>
-        <p:spPr>
-          <a:xfrm>
-            <a:off x="1914144" y="1853184"/>
-            <a:ext cx="1536192" cy="1536192"/>
-          </a:xfrm>
-          <a:prstGeom prst="ellipse">
-            <a:avLst/>
-          </a:prstGeom>
-          <a:noFill/>
-          <a:ln w="21590">
-            <a:solidFill>
-              <a:srgbClr val="B4C7D2"/>
-            </a:solidFill>
-          </a:ln>
-          <a:effectLst/>
-        </p:spPr>
-        <p:txBody>
-          <a:bodyPr rtlCol="0" anchor="ctr"/>
-          <a:lstStyle/>
-          <a:p>
-            <a:pPr algn="ctr"/>
-          </a:p>
-        </p:txBody>
-      </p:sp>
-      <p:cxnSp>
-        <p:nvCxnSpPr>
-          <p:cNvPr id="5" name="arrow4" descr="sci-ppt:C2-E03-004"/>
-          <p:cNvCxnSpPr/>
-          <p:nvPr/>
-        </p:nvCxnSpPr>
-        <p:spPr>
-          <a:xfrm>
-            <a:off x="2682240" y="2621280"/>
-            <a:ext cx="1280159" cy="0"/>
-          </a:xfrm>
-          <a:prstGeom prst="line">
-            <a:avLst/>
-          </a:prstGeom>
-          <a:ln w="25400">
+            <a:off x="365760" y="914400"/>
+            <a:ext cx="4572000" cy="4846320"/>
+          </a:xfrm>
+          <a:prstGeom prst="roundRect">
+            <a:avLst/>
+          </a:prstGeom>
+          <a:solidFill>
+            <a:srgbClr val="213E4B"/>
+          </a:solidFill>
+          <a:ln w="20320">
             <a:solidFill>
               <a:srgbClr val="8EDBD4"/>
             </a:solidFill>
-            <a:headEnd type="none" w="med" len="med"/>
-            <a:tailEnd type="triangle" w="med" len="med"/>
           </a:ln>
           <a:effectLst/>
         </p:spPr>
-      </p:cxnSp>
-      <p:sp>
-        <p:nvSpPr>
-          <p:cNvPr id="6" name="text5" descr="sci-ppt:C2-E03-005"/>
+        <p:txBody>
+          <a:bodyPr rtlCol="0" anchor="ctr"/>
+          <a:lstStyle/>
+          <a:p>
+            <a:pPr algn="ctr"/>
+          </a:p>
+        </p:txBody>
+      </p:sp>
+      <p:sp>
+        <p:nvSpPr>
+          <p:cNvPr id="4" name="C2-E03 text 2" descr="sci-ppt:o002"/>
           <p:cNvSpPr txBox="1"/>
           <p:nvPr/>
         </p:nvSpPr>
         <p:spPr>
           <a:xfrm>
-            <a:off x="2926080" y="2743200"/>
-            <a:ext cx="975360" cy="377952"/>
+            <a:off x="475488" y="969264"/>
+            <a:ext cx="4352544" cy="254889"/>
           </a:xfrm>
           <a:prstGeom prst="rect">
             <a:avLst/>
@@ -3238,7 +3186,7 @@
           <a:effectLst/>
         </p:spPr>
         <p:txBody>
-          <a:bodyPr wrap="none" lIns="27432" rIns="27432" tIns="18288" bIns="18288" anchor="ctr">
+          <a:bodyPr wrap="none" lIns="18288" rIns="18288" tIns="18288" bIns="18288" anchor="t">
             <a:spAutoFit/>
           </a:bodyPr>
           <a:lstStyle/>
@@ -3249,39 +3197,937 @@
               </a:spcAft>
             </a:pPr>
             <a:r>
-              <a:rPr sz="1920" b="0" i="0">
+              <a:rPr sz="1350" b="1" i="0">
+                <a:solidFill>
+                  <a:srgbClr val="8EDBD4"/>
+                </a:solidFill>
+                <a:latin typeface="Arial"/>
+              </a:rPr>
+              <a:t>An aperture keeps the inner part</a:t>
+            </a:r>
+          </a:p>
+        </p:txBody>
+      </p:sp>
+      <p:sp>
+        <p:nvSpPr>
+          <p:cNvPr id="5" name="C2-E03 ellipse 3" descr="sci-ppt:o003"/>
+          <p:cNvSpPr/>
+          <p:nvPr/>
+        </p:nvSpPr>
+        <p:spPr>
+          <a:xfrm>
+            <a:off x="822959" y="1463040"/>
+            <a:ext cx="3657600" cy="3657600"/>
+          </a:xfrm>
+          <a:prstGeom prst="ellipse">
+            <a:avLst/>
+          </a:prstGeom>
+          <a:solidFill>
+            <a:srgbClr val="8EDBD4">
+              <a:alpha val="5000"/>
+            </a:srgbClr>
+          </a:solidFill>
+          <a:ln>
+            <a:solidFill>
+              <a:srgbClr val="8EDBD4">
+                <a:alpha val="5000"/>
+              </a:srgbClr>
+            </a:solidFill>
+          </a:ln>
+          <a:effectLst/>
+        </p:spPr>
+        <p:txBody>
+          <a:bodyPr rtlCol="0" anchor="ctr"/>
+          <a:lstStyle/>
+          <a:p>
+            <a:pPr algn="ctr"/>
+          </a:p>
+        </p:txBody>
+      </p:sp>
+      <p:sp>
+        <p:nvSpPr>
+          <p:cNvPr id="6" name="C2-E03 ellipse 4" descr="sci-ppt:o004"/>
+          <p:cNvSpPr/>
+          <p:nvPr/>
+        </p:nvSpPr>
+        <p:spPr>
+          <a:xfrm>
+            <a:off x="906087" y="1546167"/>
+            <a:ext cx="3491345" cy="3491345"/>
+          </a:xfrm>
+          <a:prstGeom prst="ellipse">
+            <a:avLst/>
+          </a:prstGeom>
+          <a:solidFill>
+            <a:srgbClr val="8EDBD4">
+              <a:alpha val="5000"/>
+            </a:srgbClr>
+          </a:solidFill>
+          <a:ln>
+            <a:solidFill>
+              <a:srgbClr val="8EDBD4">
+                <a:alpha val="5000"/>
+              </a:srgbClr>
+            </a:solidFill>
+          </a:ln>
+          <a:effectLst/>
+        </p:spPr>
+        <p:txBody>
+          <a:bodyPr rtlCol="0" anchor="ctr"/>
+          <a:lstStyle/>
+          <a:p>
+            <a:pPr algn="ctr"/>
+          </a:p>
+        </p:txBody>
+      </p:sp>
+      <p:sp>
+        <p:nvSpPr>
+          <p:cNvPr id="7" name="C2-E03 ellipse 5" descr="sci-ppt:o005"/>
+          <p:cNvSpPr/>
+          <p:nvPr/>
+        </p:nvSpPr>
+        <p:spPr>
+          <a:xfrm>
+            <a:off x="989214" y="1629294"/>
+            <a:ext cx="3325090" cy="3325090"/>
+          </a:xfrm>
+          <a:prstGeom prst="ellipse">
+            <a:avLst/>
+          </a:prstGeom>
+          <a:solidFill>
+            <a:srgbClr val="8EDBD4">
+              <a:alpha val="5000"/>
+            </a:srgbClr>
+          </a:solidFill>
+          <a:ln>
+            <a:solidFill>
+              <a:srgbClr val="8EDBD4">
+                <a:alpha val="5000"/>
+              </a:srgbClr>
+            </a:solidFill>
+          </a:ln>
+          <a:effectLst/>
+        </p:spPr>
+        <p:txBody>
+          <a:bodyPr rtlCol="0" anchor="ctr"/>
+          <a:lstStyle/>
+          <a:p>
+            <a:pPr algn="ctr"/>
+          </a:p>
+        </p:txBody>
+      </p:sp>
+      <p:sp>
+        <p:nvSpPr>
+          <p:cNvPr id="8" name="C2-E03 ellipse 6" descr="sci-ppt:o006"/>
+          <p:cNvSpPr/>
+          <p:nvPr/>
+        </p:nvSpPr>
+        <p:spPr>
+          <a:xfrm>
+            <a:off x="1072341" y="1712421"/>
+            <a:ext cx="3158836" cy="3158836"/>
+          </a:xfrm>
+          <a:prstGeom prst="ellipse">
+            <a:avLst/>
+          </a:prstGeom>
+          <a:solidFill>
+            <a:srgbClr val="8EDBD4">
+              <a:alpha val="5000"/>
+            </a:srgbClr>
+          </a:solidFill>
+          <a:ln>
+            <a:solidFill>
+              <a:srgbClr val="8EDBD4">
+                <a:alpha val="5000"/>
+              </a:srgbClr>
+            </a:solidFill>
+          </a:ln>
+          <a:effectLst/>
+        </p:spPr>
+        <p:txBody>
+          <a:bodyPr rtlCol="0" anchor="ctr"/>
+          <a:lstStyle/>
+          <a:p>
+            <a:pPr algn="ctr"/>
+          </a:p>
+        </p:txBody>
+      </p:sp>
+      <p:sp>
+        <p:nvSpPr>
+          <p:cNvPr id="9" name="C2-E03 ellipse 7" descr="sci-ppt:o007"/>
+          <p:cNvSpPr/>
+          <p:nvPr/>
+        </p:nvSpPr>
+        <p:spPr>
+          <a:xfrm>
+            <a:off x="1155469" y="1795549"/>
+            <a:ext cx="2992581" cy="2992581"/>
+          </a:xfrm>
+          <a:prstGeom prst="ellipse">
+            <a:avLst/>
+          </a:prstGeom>
+          <a:solidFill>
+            <a:srgbClr val="8EDBD4">
+              <a:alpha val="5000"/>
+            </a:srgbClr>
+          </a:solidFill>
+          <a:ln>
+            <a:solidFill>
+              <a:srgbClr val="8EDBD4">
+                <a:alpha val="5000"/>
+              </a:srgbClr>
+            </a:solidFill>
+          </a:ln>
+          <a:effectLst/>
+        </p:spPr>
+        <p:txBody>
+          <a:bodyPr rtlCol="0" anchor="ctr"/>
+          <a:lstStyle/>
+          <a:p>
+            <a:pPr algn="ctr"/>
+          </a:p>
+        </p:txBody>
+      </p:sp>
+      <p:sp>
+        <p:nvSpPr>
+          <p:cNvPr id="10" name="C2-E03 ellipse 8" descr="sci-ppt:o008"/>
+          <p:cNvSpPr/>
+          <p:nvPr/>
+        </p:nvSpPr>
+        <p:spPr>
+          <a:xfrm>
+            <a:off x="1238596" y="1878676"/>
+            <a:ext cx="2826327" cy="2826327"/>
+          </a:xfrm>
+          <a:prstGeom prst="ellipse">
+            <a:avLst/>
+          </a:prstGeom>
+          <a:solidFill>
+            <a:srgbClr val="8EDBD4">
+              <a:alpha val="5000"/>
+            </a:srgbClr>
+          </a:solidFill>
+          <a:ln>
+            <a:solidFill>
+              <a:srgbClr val="8EDBD4">
+                <a:alpha val="5000"/>
+              </a:srgbClr>
+            </a:solidFill>
+          </a:ln>
+          <a:effectLst/>
+        </p:spPr>
+        <p:txBody>
+          <a:bodyPr rtlCol="0" anchor="ctr"/>
+          <a:lstStyle/>
+          <a:p>
+            <a:pPr algn="ctr"/>
+          </a:p>
+        </p:txBody>
+      </p:sp>
+      <p:sp>
+        <p:nvSpPr>
+          <p:cNvPr id="11" name="C2-E03 ellipse 9" descr="sci-ppt:o009"/>
+          <p:cNvSpPr/>
+          <p:nvPr/>
+        </p:nvSpPr>
+        <p:spPr>
+          <a:xfrm>
+            <a:off x="1321723" y="1961803"/>
+            <a:ext cx="2660072" cy="2660072"/>
+          </a:xfrm>
+          <a:prstGeom prst="ellipse">
+            <a:avLst/>
+          </a:prstGeom>
+          <a:solidFill>
+            <a:srgbClr val="8EDBD4">
+              <a:alpha val="5000"/>
+            </a:srgbClr>
+          </a:solidFill>
+          <a:ln>
+            <a:solidFill>
+              <a:srgbClr val="8EDBD4">
+                <a:alpha val="5000"/>
+              </a:srgbClr>
+            </a:solidFill>
+          </a:ln>
+          <a:effectLst/>
+        </p:spPr>
+        <p:txBody>
+          <a:bodyPr rtlCol="0" anchor="ctr"/>
+          <a:lstStyle/>
+          <a:p>
+            <a:pPr algn="ctr"/>
+          </a:p>
+        </p:txBody>
+      </p:sp>
+      <p:sp>
+        <p:nvSpPr>
+          <p:cNvPr id="12" name="C2-E03 ellipse 10" descr="sci-ppt:o010"/>
+          <p:cNvSpPr/>
+          <p:nvPr/>
+        </p:nvSpPr>
+        <p:spPr>
+          <a:xfrm>
+            <a:off x="1404850" y="2044930"/>
+            <a:ext cx="2493818" cy="2493818"/>
+          </a:xfrm>
+          <a:prstGeom prst="ellipse">
+            <a:avLst/>
+          </a:prstGeom>
+          <a:solidFill>
+            <a:srgbClr val="8EDBD4">
+              <a:alpha val="5000"/>
+            </a:srgbClr>
+          </a:solidFill>
+          <a:ln>
+            <a:solidFill>
+              <a:srgbClr val="8EDBD4">
+                <a:alpha val="5000"/>
+              </a:srgbClr>
+            </a:solidFill>
+          </a:ln>
+          <a:effectLst/>
+        </p:spPr>
+        <p:txBody>
+          <a:bodyPr rtlCol="0" anchor="ctr"/>
+          <a:lstStyle/>
+          <a:p>
+            <a:pPr algn="ctr"/>
+          </a:p>
+        </p:txBody>
+      </p:sp>
+      <p:sp>
+        <p:nvSpPr>
+          <p:cNvPr id="13" name="C2-E03 ellipse 11" descr="sci-ppt:o011"/>
+          <p:cNvSpPr/>
+          <p:nvPr/>
+        </p:nvSpPr>
+        <p:spPr>
+          <a:xfrm>
+            <a:off x="1487978" y="2128058"/>
+            <a:ext cx="2327563" cy="2327563"/>
+          </a:xfrm>
+          <a:prstGeom prst="ellipse">
+            <a:avLst/>
+          </a:prstGeom>
+          <a:solidFill>
+            <a:srgbClr val="8EDBD4">
+              <a:alpha val="5000"/>
+            </a:srgbClr>
+          </a:solidFill>
+          <a:ln>
+            <a:solidFill>
+              <a:srgbClr val="8EDBD4">
+                <a:alpha val="5000"/>
+              </a:srgbClr>
+            </a:solidFill>
+          </a:ln>
+          <a:effectLst/>
+        </p:spPr>
+        <p:txBody>
+          <a:bodyPr rtlCol="0" anchor="ctr"/>
+          <a:lstStyle/>
+          <a:p>
+            <a:pPr algn="ctr"/>
+          </a:p>
+        </p:txBody>
+      </p:sp>
+      <p:sp>
+        <p:nvSpPr>
+          <p:cNvPr id="14" name="C2-E03 ellipse 12" descr="sci-ppt:o012"/>
+          <p:cNvSpPr/>
+          <p:nvPr/>
+        </p:nvSpPr>
+        <p:spPr>
+          <a:xfrm>
+            <a:off x="1571105" y="2211185"/>
+            <a:ext cx="2161309" cy="2161309"/>
+          </a:xfrm>
+          <a:prstGeom prst="ellipse">
+            <a:avLst/>
+          </a:prstGeom>
+          <a:solidFill>
+            <a:srgbClr val="8EDBD4">
+              <a:alpha val="5000"/>
+            </a:srgbClr>
+          </a:solidFill>
+          <a:ln>
+            <a:solidFill>
+              <a:srgbClr val="8EDBD4">
+                <a:alpha val="5000"/>
+              </a:srgbClr>
+            </a:solidFill>
+          </a:ln>
+          <a:effectLst/>
+        </p:spPr>
+        <p:txBody>
+          <a:bodyPr rtlCol="0" anchor="ctr"/>
+          <a:lstStyle/>
+          <a:p>
+            <a:pPr algn="ctr"/>
+          </a:p>
+        </p:txBody>
+      </p:sp>
+      <p:sp>
+        <p:nvSpPr>
+          <p:cNvPr id="15" name="C2-E03 ellipse 13" descr="sci-ppt:o013"/>
+          <p:cNvSpPr/>
+          <p:nvPr/>
+        </p:nvSpPr>
+        <p:spPr>
+          <a:xfrm>
+            <a:off x="1654232" y="2294312"/>
+            <a:ext cx="1995054" cy="1995054"/>
+          </a:xfrm>
+          <a:prstGeom prst="ellipse">
+            <a:avLst/>
+          </a:prstGeom>
+          <a:solidFill>
+            <a:srgbClr val="8EDBD4">
+              <a:alpha val="7403"/>
+            </a:srgbClr>
+          </a:solidFill>
+          <a:ln>
+            <a:solidFill>
+              <a:srgbClr val="8EDBD4">
+                <a:alpha val="7403"/>
+              </a:srgbClr>
+            </a:solidFill>
+          </a:ln>
+          <a:effectLst/>
+        </p:spPr>
+        <p:txBody>
+          <a:bodyPr rtlCol="0" anchor="ctr"/>
+          <a:lstStyle/>
+          <a:p>
+            <a:pPr algn="ctr"/>
+          </a:p>
+        </p:txBody>
+      </p:sp>
+      <p:sp>
+        <p:nvSpPr>
+          <p:cNvPr id="16" name="C2-E03 ellipse 14" descr="sci-ppt:o014"/>
+          <p:cNvSpPr/>
+          <p:nvPr/>
+        </p:nvSpPr>
+        <p:spPr>
+          <a:xfrm>
+            <a:off x="1737360" y="2377440"/>
+            <a:ext cx="1828800" cy="1828800"/>
+          </a:xfrm>
+          <a:prstGeom prst="ellipse">
+            <a:avLst/>
+          </a:prstGeom>
+          <a:solidFill>
+            <a:srgbClr val="8EDBD4">
+              <a:alpha val="10827"/>
+            </a:srgbClr>
+          </a:solidFill>
+          <a:ln>
+            <a:solidFill>
+              <a:srgbClr val="8EDBD4">
+                <a:alpha val="10827"/>
+              </a:srgbClr>
+            </a:solidFill>
+          </a:ln>
+          <a:effectLst/>
+        </p:spPr>
+        <p:txBody>
+          <a:bodyPr rtlCol="0" anchor="ctr"/>
+          <a:lstStyle/>
+          <a:p>
+            <a:pPr algn="ctr"/>
+          </a:p>
+        </p:txBody>
+      </p:sp>
+      <p:sp>
+        <p:nvSpPr>
+          <p:cNvPr id="17" name="C2-E03 ellipse 15" descr="sci-ppt:o015"/>
+          <p:cNvSpPr/>
+          <p:nvPr/>
+        </p:nvSpPr>
+        <p:spPr>
+          <a:xfrm>
+            <a:off x="1820487" y="2460567"/>
+            <a:ext cx="1662545" cy="1662545"/>
+          </a:xfrm>
+          <a:prstGeom prst="ellipse">
+            <a:avLst/>
+          </a:prstGeom>
+          <a:solidFill>
+            <a:srgbClr val="8EDBD4">
+              <a:alpha val="15320"/>
+            </a:srgbClr>
+          </a:solidFill>
+          <a:ln>
+            <a:solidFill>
+              <a:srgbClr val="8EDBD4">
+                <a:alpha val="15320"/>
+              </a:srgbClr>
+            </a:solidFill>
+          </a:ln>
+          <a:effectLst/>
+        </p:spPr>
+        <p:txBody>
+          <a:bodyPr rtlCol="0" anchor="ctr"/>
+          <a:lstStyle/>
+          <a:p>
+            <a:pPr algn="ctr"/>
+          </a:p>
+        </p:txBody>
+      </p:sp>
+      <p:sp>
+        <p:nvSpPr>
+          <p:cNvPr id="18" name="C2-E03 ellipse 16" descr="sci-ppt:o016"/>
+          <p:cNvSpPr/>
+          <p:nvPr/>
+        </p:nvSpPr>
+        <p:spPr>
+          <a:xfrm>
+            <a:off x="1903614" y="2543694"/>
+            <a:ext cx="1496290" cy="1496290"/>
+          </a:xfrm>
+          <a:prstGeom prst="ellipse">
+            <a:avLst/>
+          </a:prstGeom>
+          <a:solidFill>
+            <a:srgbClr val="8EDBD4">
+              <a:alpha val="20972"/>
+            </a:srgbClr>
+          </a:solidFill>
+          <a:ln>
+            <a:solidFill>
+              <a:srgbClr val="8EDBD4">
+                <a:alpha val="20972"/>
+              </a:srgbClr>
+            </a:solidFill>
+          </a:ln>
+          <a:effectLst/>
+        </p:spPr>
+        <p:txBody>
+          <a:bodyPr rtlCol="0" anchor="ctr"/>
+          <a:lstStyle/>
+          <a:p>
+            <a:pPr algn="ctr"/>
+          </a:p>
+        </p:txBody>
+      </p:sp>
+      <p:sp>
+        <p:nvSpPr>
+          <p:cNvPr id="19" name="C2-E03 ellipse 17" descr="sci-ppt:o017"/>
+          <p:cNvSpPr/>
+          <p:nvPr/>
+        </p:nvSpPr>
+        <p:spPr>
+          <a:xfrm>
+            <a:off x="1986741" y="2626821"/>
+            <a:ext cx="1330036" cy="1330036"/>
+          </a:xfrm>
+          <a:prstGeom prst="ellipse">
+            <a:avLst/>
+          </a:prstGeom>
+          <a:solidFill>
+            <a:srgbClr val="8EDBD4">
+              <a:alpha val="27776"/>
+            </a:srgbClr>
+          </a:solidFill>
+          <a:ln>
+            <a:solidFill>
+              <a:srgbClr val="8EDBD4">
+                <a:alpha val="27776"/>
+              </a:srgbClr>
+            </a:solidFill>
+          </a:ln>
+          <a:effectLst/>
+        </p:spPr>
+        <p:txBody>
+          <a:bodyPr rtlCol="0" anchor="ctr"/>
+          <a:lstStyle/>
+          <a:p>
+            <a:pPr algn="ctr"/>
+          </a:p>
+        </p:txBody>
+      </p:sp>
+      <p:sp>
+        <p:nvSpPr>
+          <p:cNvPr id="20" name="C2-E03 ellipse 18" descr="sci-ppt:o018"/>
+          <p:cNvSpPr/>
+          <p:nvPr/>
+        </p:nvSpPr>
+        <p:spPr>
+          <a:xfrm>
+            <a:off x="2069869" y="2709949"/>
+            <a:ext cx="1163781" cy="1163781"/>
+          </a:xfrm>
+          <a:prstGeom prst="ellipse">
+            <a:avLst/>
+          </a:prstGeom>
+          <a:solidFill>
+            <a:srgbClr val="8EDBD4">
+              <a:alpha val="35592"/>
+            </a:srgbClr>
+          </a:solidFill>
+          <a:ln>
+            <a:solidFill>
+              <a:srgbClr val="8EDBD4">
+                <a:alpha val="35592"/>
+              </a:srgbClr>
+            </a:solidFill>
+          </a:ln>
+          <a:effectLst/>
+        </p:spPr>
+        <p:txBody>
+          <a:bodyPr rtlCol="0" anchor="ctr"/>
+          <a:lstStyle/>
+          <a:p>
+            <a:pPr algn="ctr"/>
+          </a:p>
+        </p:txBody>
+      </p:sp>
+      <p:sp>
+        <p:nvSpPr>
+          <p:cNvPr id="21" name="C2-E03 ellipse 19" descr="sci-ppt:o019"/>
+          <p:cNvSpPr/>
+          <p:nvPr/>
+        </p:nvSpPr>
+        <p:spPr>
+          <a:xfrm>
+            <a:off x="2152996" y="2793076"/>
+            <a:ext cx="997527" cy="997527"/>
+          </a:xfrm>
+          <a:prstGeom prst="ellipse">
+            <a:avLst/>
+          </a:prstGeom>
+          <a:solidFill>
+            <a:srgbClr val="8EDBD4">
+              <a:alpha val="44123"/>
+            </a:srgbClr>
+          </a:solidFill>
+          <a:ln>
+            <a:solidFill>
+              <a:srgbClr val="8EDBD4">
+                <a:alpha val="44123"/>
+              </a:srgbClr>
+            </a:solidFill>
+          </a:ln>
+          <a:effectLst/>
+        </p:spPr>
+        <p:txBody>
+          <a:bodyPr rtlCol="0" anchor="ctr"/>
+          <a:lstStyle/>
+          <a:p>
+            <a:pPr algn="ctr"/>
+          </a:p>
+        </p:txBody>
+      </p:sp>
+      <p:sp>
+        <p:nvSpPr>
+          <p:cNvPr id="22" name="C2-E03 ellipse 20" descr="sci-ppt:o020"/>
+          <p:cNvSpPr/>
+          <p:nvPr/>
+        </p:nvSpPr>
+        <p:spPr>
+          <a:xfrm>
+            <a:off x="2236123" y="2876203"/>
+            <a:ext cx="831272" cy="831272"/>
+          </a:xfrm>
+          <a:prstGeom prst="ellipse">
+            <a:avLst/>
+          </a:prstGeom>
+          <a:solidFill>
+            <a:srgbClr val="8EDBD4">
+              <a:alpha val="52921"/>
+            </a:srgbClr>
+          </a:solidFill>
+          <a:ln>
+            <a:solidFill>
+              <a:srgbClr val="8EDBD4">
+                <a:alpha val="52921"/>
+              </a:srgbClr>
+            </a:solidFill>
+          </a:ln>
+          <a:effectLst/>
+        </p:spPr>
+        <p:txBody>
+          <a:bodyPr rtlCol="0" anchor="ctr"/>
+          <a:lstStyle/>
+          <a:p>
+            <a:pPr algn="ctr"/>
+          </a:p>
+        </p:txBody>
+      </p:sp>
+      <p:sp>
+        <p:nvSpPr>
+          <p:cNvPr id="23" name="C2-E03 ellipse 21" descr="sci-ppt:o021"/>
+          <p:cNvSpPr/>
+          <p:nvPr/>
+        </p:nvSpPr>
+        <p:spPr>
+          <a:xfrm>
+            <a:off x="2319250" y="2959330"/>
+            <a:ext cx="665018" cy="665018"/>
+          </a:xfrm>
+          <a:prstGeom prst="ellipse">
+            <a:avLst/>
+          </a:prstGeom>
+          <a:solidFill>
+            <a:srgbClr val="8EDBD4">
+              <a:alpha val="61409"/>
+            </a:srgbClr>
+          </a:solidFill>
+          <a:ln>
+            <a:solidFill>
+              <a:srgbClr val="8EDBD4">
+                <a:alpha val="61409"/>
+              </a:srgbClr>
+            </a:solidFill>
+          </a:ln>
+          <a:effectLst/>
+        </p:spPr>
+        <p:txBody>
+          <a:bodyPr rtlCol="0" anchor="ctr"/>
+          <a:lstStyle/>
+          <a:p>
+            <a:pPr algn="ctr"/>
+          </a:p>
+        </p:txBody>
+      </p:sp>
+      <p:sp>
+        <p:nvSpPr>
+          <p:cNvPr id="24" name="C2-E03 ellipse 22" descr="sci-ppt:o022"/>
+          <p:cNvSpPr/>
+          <p:nvPr/>
+        </p:nvSpPr>
+        <p:spPr>
+          <a:xfrm>
+            <a:off x="2402378" y="3042458"/>
+            <a:ext cx="498763" cy="498763"/>
+          </a:xfrm>
+          <a:prstGeom prst="ellipse">
+            <a:avLst/>
+          </a:prstGeom>
+          <a:solidFill>
+            <a:srgbClr val="8EDBD4">
+              <a:alpha val="68942"/>
+            </a:srgbClr>
+          </a:solidFill>
+          <a:ln>
+            <a:solidFill>
+              <a:srgbClr val="8EDBD4">
+                <a:alpha val="68942"/>
+              </a:srgbClr>
+            </a:solidFill>
+          </a:ln>
+          <a:effectLst/>
+        </p:spPr>
+        <p:txBody>
+          <a:bodyPr rtlCol="0" anchor="ctr"/>
+          <a:lstStyle/>
+          <a:p>
+            <a:pPr algn="ctr"/>
+          </a:p>
+        </p:txBody>
+      </p:sp>
+      <p:sp>
+        <p:nvSpPr>
+          <p:cNvPr id="25" name="C2-E03 ellipse 23" descr="sci-ppt:o023"/>
+          <p:cNvSpPr/>
+          <p:nvPr/>
+        </p:nvSpPr>
+        <p:spPr>
+          <a:xfrm>
+            <a:off x="2485505" y="3125585"/>
+            <a:ext cx="332509" cy="332509"/>
+          </a:xfrm>
+          <a:prstGeom prst="ellipse">
+            <a:avLst/>
+          </a:prstGeom>
+          <a:solidFill>
+            <a:srgbClr val="8EDBD4">
+              <a:alpha val="74882"/>
+            </a:srgbClr>
+          </a:solidFill>
+          <a:ln>
+            <a:solidFill>
+              <a:srgbClr val="8EDBD4">
+                <a:alpha val="74882"/>
+              </a:srgbClr>
+            </a:solidFill>
+          </a:ln>
+          <a:effectLst/>
+        </p:spPr>
+        <p:txBody>
+          <a:bodyPr rtlCol="0" anchor="ctr"/>
+          <a:lstStyle/>
+          <a:p>
+            <a:pPr algn="ctr"/>
+          </a:p>
+        </p:txBody>
+      </p:sp>
+      <p:sp>
+        <p:nvSpPr>
+          <p:cNvPr id="26" name="C2-E03 ellipse 24" descr="sci-ppt:o024"/>
+          <p:cNvSpPr/>
+          <p:nvPr/>
+        </p:nvSpPr>
+        <p:spPr>
+          <a:xfrm>
+            <a:off x="2568632" y="3208712"/>
+            <a:ext cx="166254" cy="166254"/>
+          </a:xfrm>
+          <a:prstGeom prst="ellipse">
+            <a:avLst/>
+          </a:prstGeom>
+          <a:solidFill>
+            <a:srgbClr val="8EDBD4">
+              <a:alpha val="78689"/>
+            </a:srgbClr>
+          </a:solidFill>
+          <a:ln>
+            <a:solidFill>
+              <a:srgbClr val="8EDBD4">
+                <a:alpha val="78689"/>
+              </a:srgbClr>
+            </a:solidFill>
+          </a:ln>
+          <a:effectLst/>
+        </p:spPr>
+        <p:txBody>
+          <a:bodyPr rtlCol="0" anchor="ctr"/>
+          <a:lstStyle/>
+          <a:p>
+            <a:pPr algn="ctr"/>
+          </a:p>
+        </p:txBody>
+      </p:sp>
+      <p:sp>
+        <p:nvSpPr>
+          <p:cNvPr id="27" name="C2-E03 ellipse 25" descr="sci-ppt:o025"/>
+          <p:cNvSpPr/>
+          <p:nvPr/>
+        </p:nvSpPr>
+        <p:spPr>
+          <a:xfrm>
+            <a:off x="2194560" y="2834640"/>
+            <a:ext cx="914400" cy="914400"/>
+          </a:xfrm>
+          <a:prstGeom prst="ellipse">
+            <a:avLst/>
+          </a:prstGeom>
+          <a:noFill/>
+          <a:ln w="27940">
+            <a:solidFill>
+              <a:srgbClr val="F28BA0"/>
+            </a:solidFill>
+          </a:ln>
+          <a:effectLst/>
+        </p:spPr>
+        <p:txBody>
+          <a:bodyPr rtlCol="0" anchor="ctr"/>
+          <a:lstStyle/>
+          <a:p>
+            <a:pPr algn="ctr"/>
+          </a:p>
+        </p:txBody>
+      </p:sp>
+      <p:sp>
+        <p:nvSpPr>
+          <p:cNvPr id="28" name="C2-E03 ellipse 26" descr="sci-ppt:o026"/>
+          <p:cNvSpPr/>
+          <p:nvPr/>
+        </p:nvSpPr>
+        <p:spPr>
+          <a:xfrm>
+            <a:off x="1737360" y="2377440"/>
+            <a:ext cx="1828800" cy="1828800"/>
+          </a:xfrm>
+          <a:prstGeom prst="ellipse">
+            <a:avLst/>
+          </a:prstGeom>
+          <a:noFill/>
+          <a:ln w="27940">
+            <a:solidFill>
+              <a:srgbClr val="F2B880"/>
+            </a:solidFill>
+          </a:ln>
+          <a:effectLst/>
+        </p:spPr>
+        <p:txBody>
+          <a:bodyPr rtlCol="0" anchor="ctr"/>
+          <a:lstStyle/>
+          <a:p>
+            <a:pPr algn="ctr"/>
+          </a:p>
+        </p:txBody>
+      </p:sp>
+      <p:sp>
+        <p:nvSpPr>
+          <p:cNvPr id="29" name="C2-E03 ellipse 27" descr="sci-ppt:o027"/>
+          <p:cNvSpPr/>
+          <p:nvPr/>
+        </p:nvSpPr>
+        <p:spPr>
+          <a:xfrm>
+            <a:off x="1280160" y="1920240"/>
+            <a:ext cx="2743200" cy="2743200"/>
+          </a:xfrm>
+          <a:prstGeom prst="ellipse">
+            <a:avLst/>
+          </a:prstGeom>
+          <a:noFill/>
+          <a:ln w="27940">
+            <a:solidFill>
+              <a:srgbClr val="7FC8F8"/>
+            </a:solidFill>
+          </a:ln>
+          <a:effectLst/>
+        </p:spPr>
+        <p:txBody>
+          <a:bodyPr rtlCol="0" anchor="ctr"/>
+          <a:lstStyle/>
+          <a:p>
+            <a:pPr algn="ctr"/>
+          </a:p>
+        </p:txBody>
+      </p:sp>
+      <p:sp>
+        <p:nvSpPr>
+          <p:cNvPr id="30" name="C2-E03 text 28" descr="sci-ppt:o028"/>
+          <p:cNvSpPr txBox="1"/>
+          <p:nvPr/>
+        </p:nvSpPr>
+        <p:spPr>
+          <a:xfrm>
+            <a:off x="502920" y="5257800"/>
+            <a:ext cx="4297680" cy="417576"/>
+          </a:xfrm>
+          <a:prstGeom prst="rect">
+            <a:avLst/>
+          </a:prstGeom>
+          <a:noFill/>
+          <a:effectLst/>
+        </p:spPr>
+        <p:txBody>
+          <a:bodyPr wrap="none" lIns="18288" rIns="18288" tIns="18288" bIns="18288" anchor="t">
+            <a:spAutoFit/>
+          </a:bodyPr>
+          <a:lstStyle/>
+          <a:p>
+            <a:pPr algn="l">
+              <a:spcAft>
+                <a:spcPts val="0"/>
+              </a:spcAft>
+            </a:pPr>
+            <a:r>
+              <a:rPr sz="1200" b="0" i="0">
                 <a:solidFill>
                   <a:srgbClr val="E7F0F3"/>
                 </a:solidFill>
                 <a:latin typeface="Arial"/>
               </a:rPr>
-              <a:t>w</a:t>
-            </a:r>
-          </a:p>
-        </p:txBody>
-      </p:sp>
-      <p:sp>
-        <p:nvSpPr>
-          <p:cNvPr id="7" name="text6" descr="sci-ppt:C2-E03-006"/>
-          <p:cNvSpPr txBox="1"/>
-          <p:nvPr/>
-        </p:nvSpPr>
-        <p:spPr>
-          <a:xfrm>
-            <a:off x="1402080" y="4084320"/>
-            <a:ext cx="4876800" cy="340156"/>
-          </a:xfrm>
-          <a:prstGeom prst="rect">
-            <a:avLst/>
-          </a:prstGeom>
-          <a:noFill/>
-          <a:effectLst/>
-        </p:spPr>
-        <p:txBody>
-          <a:bodyPr wrap="none" lIns="27432" rIns="27432" tIns="18288" bIns="18288" anchor="ctr">
-            <a:spAutoFit/>
-          </a:bodyPr>
-          <a:lstStyle/>
+              <a:t>Circles: absorber apertures bₐ = 0.5w, w, 1.5w. Light</a:t>
+            </a:r>
+          </a:p>
           <a:p>
             <a:pPr algn="l">
               <a:spcAft>
@@ -3289,75 +4135,115 @@
               </a:spcAft>
             </a:pPr>
             <a:r>
-              <a:rPr sz="1728" b="0" i="0">
+              <a:rPr sz="1200" b="0" i="0">
                 <a:solidFill>
                   <a:srgbClr val="E7F0F3"/>
                 </a:solidFill>
                 <a:latin typeface="Arial"/>
               </a:rPr>
-              <a:t>Illuminated transverse plane</a:t>
+              <a:t>outside is not used.</a:t>
             </a:r>
           </a:p>
         </p:txBody>
       </p:sp>
       <p:cxnSp>
         <p:nvCxnSpPr>
-          <p:cNvPr id="8" name="arrow7" descr="sci-ppt:C2-E03-007"/>
+          <p:cNvPr id="31" name="C2-E03 line 29" descr="sci-ppt:o029"/>
           <p:cNvCxnSpPr/>
           <p:nvPr/>
         </p:nvCxnSpPr>
         <p:spPr>
           <a:xfrm>
-            <a:off x="6583680" y="3962399"/>
-            <a:ext cx="4267200" cy="0"/>
+            <a:off x="5760720" y="5029200"/>
+            <a:ext cx="5943600" cy="0"/>
           </a:xfrm>
           <a:prstGeom prst="line">
             <a:avLst/>
           </a:prstGeom>
-          <a:ln w="25400">
+          <a:ln w="19050">
             <a:solidFill>
-              <a:srgbClr val="8EDBD4"/>
+              <a:srgbClr val="B4C7D2"/>
             </a:solidFill>
-            <a:headEnd type="none" w="med" len="med"/>
-            <a:tailEnd type="triangle" w="med" len="med"/>
           </a:ln>
           <a:effectLst/>
         </p:spPr>
       </p:cxnSp>
       <p:cxnSp>
         <p:nvCxnSpPr>
-          <p:cNvPr id="9" name="arrow8" descr="sci-ppt:C2-E03-008"/>
+          <p:cNvPr id="32" name="C2-E03 line 30" descr="sci-ppt:o030"/>
           <p:cNvCxnSpPr/>
           <p:nvPr/>
         </p:nvCxnSpPr>
         <p:spPr>
-          <a:xfrm flipV="1">
-            <a:off x="6583680" y="1402080"/>
-            <a:ext cx="0" cy="2560319"/>
+          <a:xfrm>
+            <a:off x="5760720" y="1371600"/>
+            <a:ext cx="0" cy="3657600"/>
           </a:xfrm>
           <a:prstGeom prst="line">
             <a:avLst/>
           </a:prstGeom>
-          <a:ln w="25400">
+          <a:ln w="19050">
             <a:solidFill>
-              <a:srgbClr val="8EDBD4"/>
+              <a:srgbClr val="B4C7D2"/>
             </a:solidFill>
-            <a:headEnd type="none" w="med" len="med"/>
-            <a:tailEnd type="triangle" w="med" len="med"/>
           </a:ln>
           <a:effectLst/>
         </p:spPr>
       </p:cxnSp>
-      <p:sp>
-        <p:nvSpPr>
-          <p:cNvPr id="10" name="text9" descr="sci-ppt:C2-E03-009"/>
+      <p:cxnSp>
+        <p:nvCxnSpPr>
+          <p:cNvPr id="33" name="C2-E03 line 31" descr="sci-ppt:o031"/>
+          <p:cNvCxnSpPr/>
+          <p:nvPr/>
+        </p:nvCxnSpPr>
+        <p:spPr>
+          <a:xfrm>
+            <a:off x="5760720" y="5029200"/>
+            <a:ext cx="0" cy="64008"/>
+          </a:xfrm>
+          <a:prstGeom prst="line">
+            <a:avLst/>
+          </a:prstGeom>
+          <a:ln w="12700">
+            <a:solidFill>
+              <a:srgbClr val="B4C7D2"/>
+            </a:solidFill>
+          </a:ln>
+          <a:effectLst/>
+        </p:spPr>
+      </p:cxnSp>
+      <p:cxnSp>
+        <p:nvCxnSpPr>
+          <p:cNvPr id="34" name="C2-E03 line 32" descr="sci-ppt:o032"/>
+          <p:cNvCxnSpPr/>
+          <p:nvPr/>
+        </p:nvCxnSpPr>
+        <p:spPr>
+          <a:xfrm>
+            <a:off x="5760720" y="1371600"/>
+            <a:ext cx="0" cy="3657600"/>
+          </a:xfrm>
+          <a:prstGeom prst="line">
+            <a:avLst/>
+          </a:prstGeom>
+          <a:ln w="7620">
+            <a:solidFill>
+              <a:srgbClr val="2E4756"/>
+            </a:solidFill>
+          </a:ln>
+          <a:effectLst/>
+        </p:spPr>
+      </p:cxnSp>
+      <p:sp>
+        <p:nvSpPr>
+          <p:cNvPr id="35" name="C2-E03 text 33" descr="sci-ppt:o033"/>
           <p:cNvSpPr txBox="1"/>
           <p:nvPr/>
         </p:nvSpPr>
         <p:spPr>
           <a:xfrm>
-            <a:off x="9875520" y="4084320"/>
-            <a:ext cx="1828800" cy="321259"/>
+            <a:off x="5303520" y="5111496"/>
+            <a:ext cx="914400" cy="208407"/>
           </a:xfrm>
           <a:prstGeom prst="rect">
             <a:avLst/>
@@ -3366,7 +4252,865 @@
           <a:effectLst/>
         </p:spPr>
         <p:txBody>
-          <a:bodyPr wrap="none" lIns="27432" rIns="27432" tIns="18288" bIns="18288" anchor="ctr">
+          <a:bodyPr wrap="none" lIns="18288" rIns="18288" tIns="18288" bIns="18288" anchor="t">
+            <a:spAutoFit/>
+          </a:bodyPr>
+          <a:lstStyle/>
+          <a:p>
+            <a:pPr algn="ctr">
+              <a:spcAft>
+                <a:spcPts val="0"/>
+              </a:spcAft>
+            </a:pPr>
+            <a:r>
+              <a:rPr sz="1050" b="0" i="0">
+                <a:solidFill>
+                  <a:srgbClr val="B4C7D2"/>
+                </a:solidFill>
+                <a:latin typeface="Arial"/>
+              </a:rPr>
+              <a:t>0.0</a:t>
+            </a:r>
+          </a:p>
+        </p:txBody>
+      </p:sp>
+      <p:cxnSp>
+        <p:nvCxnSpPr>
+          <p:cNvPr id="36" name="C2-E03 line 34" descr="sci-ppt:o034"/>
+          <p:cNvCxnSpPr/>
+          <p:nvPr/>
+        </p:nvCxnSpPr>
+        <p:spPr>
+          <a:xfrm>
+            <a:off x="6949440" y="5029200"/>
+            <a:ext cx="0" cy="64008"/>
+          </a:xfrm>
+          <a:prstGeom prst="line">
+            <a:avLst/>
+          </a:prstGeom>
+          <a:ln w="12700">
+            <a:solidFill>
+              <a:srgbClr val="B4C7D2"/>
+            </a:solidFill>
+          </a:ln>
+          <a:effectLst/>
+        </p:spPr>
+      </p:cxnSp>
+      <p:cxnSp>
+        <p:nvCxnSpPr>
+          <p:cNvPr id="37" name="C2-E03 line 35" descr="sci-ppt:o035"/>
+          <p:cNvCxnSpPr/>
+          <p:nvPr/>
+        </p:nvCxnSpPr>
+        <p:spPr>
+          <a:xfrm>
+            <a:off x="6949440" y="1371600"/>
+            <a:ext cx="0" cy="3657600"/>
+          </a:xfrm>
+          <a:prstGeom prst="line">
+            <a:avLst/>
+          </a:prstGeom>
+          <a:ln w="7620">
+            <a:solidFill>
+              <a:srgbClr val="2E4756"/>
+            </a:solidFill>
+          </a:ln>
+          <a:effectLst/>
+        </p:spPr>
+      </p:cxnSp>
+      <p:sp>
+        <p:nvSpPr>
+          <p:cNvPr id="38" name="C2-E03 text 36" descr="sci-ppt:o036"/>
+          <p:cNvSpPr txBox="1"/>
+          <p:nvPr/>
+        </p:nvSpPr>
+        <p:spPr>
+          <a:xfrm>
+            <a:off x="6492240" y="5111496"/>
+            <a:ext cx="914400" cy="208407"/>
+          </a:xfrm>
+          <a:prstGeom prst="rect">
+            <a:avLst/>
+          </a:prstGeom>
+          <a:noFill/>
+          <a:effectLst/>
+        </p:spPr>
+        <p:txBody>
+          <a:bodyPr wrap="none" lIns="18288" rIns="18288" tIns="18288" bIns="18288" anchor="t">
+            <a:spAutoFit/>
+          </a:bodyPr>
+          <a:lstStyle/>
+          <a:p>
+            <a:pPr algn="ctr">
+              <a:spcAft>
+                <a:spcPts val="0"/>
+              </a:spcAft>
+            </a:pPr>
+            <a:r>
+              <a:rPr sz="1050" b="0" i="0">
+                <a:solidFill>
+                  <a:srgbClr val="B4C7D2"/>
+                </a:solidFill>
+                <a:latin typeface="Arial"/>
+              </a:rPr>
+              <a:t>0.5</a:t>
+            </a:r>
+          </a:p>
+        </p:txBody>
+      </p:sp>
+      <p:cxnSp>
+        <p:nvCxnSpPr>
+          <p:cNvPr id="39" name="C2-E03 line 37" descr="sci-ppt:o037"/>
+          <p:cNvCxnSpPr/>
+          <p:nvPr/>
+        </p:nvCxnSpPr>
+        <p:spPr>
+          <a:xfrm>
+            <a:off x="8138160" y="5029200"/>
+            <a:ext cx="0" cy="64008"/>
+          </a:xfrm>
+          <a:prstGeom prst="line">
+            <a:avLst/>
+          </a:prstGeom>
+          <a:ln w="12700">
+            <a:solidFill>
+              <a:srgbClr val="B4C7D2"/>
+            </a:solidFill>
+          </a:ln>
+          <a:effectLst/>
+        </p:spPr>
+      </p:cxnSp>
+      <p:cxnSp>
+        <p:nvCxnSpPr>
+          <p:cNvPr id="40" name="C2-E03 line 38" descr="sci-ppt:o038"/>
+          <p:cNvCxnSpPr/>
+          <p:nvPr/>
+        </p:nvCxnSpPr>
+        <p:spPr>
+          <a:xfrm>
+            <a:off x="8138160" y="1371600"/>
+            <a:ext cx="0" cy="3657600"/>
+          </a:xfrm>
+          <a:prstGeom prst="line">
+            <a:avLst/>
+          </a:prstGeom>
+          <a:ln w="7620">
+            <a:solidFill>
+              <a:srgbClr val="2E4756"/>
+            </a:solidFill>
+          </a:ln>
+          <a:effectLst/>
+        </p:spPr>
+      </p:cxnSp>
+      <p:sp>
+        <p:nvSpPr>
+          <p:cNvPr id="41" name="C2-E03 text 39" descr="sci-ppt:o039"/>
+          <p:cNvSpPr txBox="1"/>
+          <p:nvPr/>
+        </p:nvSpPr>
+        <p:spPr>
+          <a:xfrm>
+            <a:off x="7680960" y="5111496"/>
+            <a:ext cx="914400" cy="208407"/>
+          </a:xfrm>
+          <a:prstGeom prst="rect">
+            <a:avLst/>
+          </a:prstGeom>
+          <a:noFill/>
+          <a:effectLst/>
+        </p:spPr>
+        <p:txBody>
+          <a:bodyPr wrap="none" lIns="18288" rIns="18288" tIns="18288" bIns="18288" anchor="t">
+            <a:spAutoFit/>
+          </a:bodyPr>
+          <a:lstStyle/>
+          <a:p>
+            <a:pPr algn="ctr">
+              <a:spcAft>
+                <a:spcPts val="0"/>
+              </a:spcAft>
+            </a:pPr>
+            <a:r>
+              <a:rPr sz="1050" b="0" i="0">
+                <a:solidFill>
+                  <a:srgbClr val="B4C7D2"/>
+                </a:solidFill>
+                <a:latin typeface="Arial"/>
+              </a:rPr>
+              <a:t>1.0</a:t>
+            </a:r>
+          </a:p>
+        </p:txBody>
+      </p:sp>
+      <p:cxnSp>
+        <p:nvCxnSpPr>
+          <p:cNvPr id="42" name="C2-E03 line 40" descr="sci-ppt:o040"/>
+          <p:cNvCxnSpPr/>
+          <p:nvPr/>
+        </p:nvCxnSpPr>
+        <p:spPr>
+          <a:xfrm>
+            <a:off x="9326880" y="5029200"/>
+            <a:ext cx="0" cy="64008"/>
+          </a:xfrm>
+          <a:prstGeom prst="line">
+            <a:avLst/>
+          </a:prstGeom>
+          <a:ln w="12700">
+            <a:solidFill>
+              <a:srgbClr val="B4C7D2"/>
+            </a:solidFill>
+          </a:ln>
+          <a:effectLst/>
+        </p:spPr>
+      </p:cxnSp>
+      <p:cxnSp>
+        <p:nvCxnSpPr>
+          <p:cNvPr id="43" name="C2-E03 line 41" descr="sci-ppt:o041"/>
+          <p:cNvCxnSpPr/>
+          <p:nvPr/>
+        </p:nvCxnSpPr>
+        <p:spPr>
+          <a:xfrm>
+            <a:off x="9326880" y="1371600"/>
+            <a:ext cx="0" cy="3657600"/>
+          </a:xfrm>
+          <a:prstGeom prst="line">
+            <a:avLst/>
+          </a:prstGeom>
+          <a:ln w="7620">
+            <a:solidFill>
+              <a:srgbClr val="2E4756"/>
+            </a:solidFill>
+          </a:ln>
+          <a:effectLst/>
+        </p:spPr>
+      </p:cxnSp>
+      <p:sp>
+        <p:nvSpPr>
+          <p:cNvPr id="44" name="C2-E03 text 42" descr="sci-ppt:o042"/>
+          <p:cNvSpPr txBox="1"/>
+          <p:nvPr/>
+        </p:nvSpPr>
+        <p:spPr>
+          <a:xfrm>
+            <a:off x="8869680" y="5111496"/>
+            <a:ext cx="914400" cy="208407"/>
+          </a:xfrm>
+          <a:prstGeom prst="rect">
+            <a:avLst/>
+          </a:prstGeom>
+          <a:noFill/>
+          <a:effectLst/>
+        </p:spPr>
+        <p:txBody>
+          <a:bodyPr wrap="none" lIns="18288" rIns="18288" tIns="18288" bIns="18288" anchor="t">
+            <a:spAutoFit/>
+          </a:bodyPr>
+          <a:lstStyle/>
+          <a:p>
+            <a:pPr algn="ctr">
+              <a:spcAft>
+                <a:spcPts val="0"/>
+              </a:spcAft>
+            </a:pPr>
+            <a:r>
+              <a:rPr sz="1050" b="0" i="0">
+                <a:solidFill>
+                  <a:srgbClr val="B4C7D2"/>
+                </a:solidFill>
+                <a:latin typeface="Arial"/>
+              </a:rPr>
+              <a:t>1.5</a:t>
+            </a:r>
+          </a:p>
+        </p:txBody>
+      </p:sp>
+      <p:cxnSp>
+        <p:nvCxnSpPr>
+          <p:cNvPr id="45" name="C2-E03 line 43" descr="sci-ppt:o043"/>
+          <p:cNvCxnSpPr/>
+          <p:nvPr/>
+        </p:nvCxnSpPr>
+        <p:spPr>
+          <a:xfrm>
+            <a:off x="10515600" y="5029200"/>
+            <a:ext cx="0" cy="64008"/>
+          </a:xfrm>
+          <a:prstGeom prst="line">
+            <a:avLst/>
+          </a:prstGeom>
+          <a:ln w="12700">
+            <a:solidFill>
+              <a:srgbClr val="B4C7D2"/>
+            </a:solidFill>
+          </a:ln>
+          <a:effectLst/>
+        </p:spPr>
+      </p:cxnSp>
+      <p:cxnSp>
+        <p:nvCxnSpPr>
+          <p:cNvPr id="46" name="C2-E03 line 44" descr="sci-ppt:o044"/>
+          <p:cNvCxnSpPr/>
+          <p:nvPr/>
+        </p:nvCxnSpPr>
+        <p:spPr>
+          <a:xfrm>
+            <a:off x="10515600" y="1371600"/>
+            <a:ext cx="0" cy="3657600"/>
+          </a:xfrm>
+          <a:prstGeom prst="line">
+            <a:avLst/>
+          </a:prstGeom>
+          <a:ln w="7620">
+            <a:solidFill>
+              <a:srgbClr val="2E4756"/>
+            </a:solidFill>
+          </a:ln>
+          <a:effectLst/>
+        </p:spPr>
+      </p:cxnSp>
+      <p:sp>
+        <p:nvSpPr>
+          <p:cNvPr id="47" name="C2-E03 text 45" descr="sci-ppt:o045"/>
+          <p:cNvSpPr txBox="1"/>
+          <p:nvPr/>
+        </p:nvSpPr>
+        <p:spPr>
+          <a:xfrm>
+            <a:off x="10058400" y="5111496"/>
+            <a:ext cx="914400" cy="208407"/>
+          </a:xfrm>
+          <a:prstGeom prst="rect">
+            <a:avLst/>
+          </a:prstGeom>
+          <a:noFill/>
+          <a:effectLst/>
+        </p:spPr>
+        <p:txBody>
+          <a:bodyPr wrap="none" lIns="18288" rIns="18288" tIns="18288" bIns="18288" anchor="t">
+            <a:spAutoFit/>
+          </a:bodyPr>
+          <a:lstStyle/>
+          <a:p>
+            <a:pPr algn="ctr">
+              <a:spcAft>
+                <a:spcPts val="0"/>
+              </a:spcAft>
+            </a:pPr>
+            <a:r>
+              <a:rPr sz="1050" b="0" i="0">
+                <a:solidFill>
+                  <a:srgbClr val="B4C7D2"/>
+                </a:solidFill>
+                <a:latin typeface="Arial"/>
+              </a:rPr>
+              <a:t>2.0</a:t>
+            </a:r>
+          </a:p>
+        </p:txBody>
+      </p:sp>
+      <p:cxnSp>
+        <p:nvCxnSpPr>
+          <p:cNvPr id="48" name="C2-E03 line 46" descr="sci-ppt:o046"/>
+          <p:cNvCxnSpPr/>
+          <p:nvPr/>
+        </p:nvCxnSpPr>
+        <p:spPr>
+          <a:xfrm>
+            <a:off x="11704320" y="5029200"/>
+            <a:ext cx="0" cy="64008"/>
+          </a:xfrm>
+          <a:prstGeom prst="line">
+            <a:avLst/>
+          </a:prstGeom>
+          <a:ln w="12700">
+            <a:solidFill>
+              <a:srgbClr val="B4C7D2"/>
+            </a:solidFill>
+          </a:ln>
+          <a:effectLst/>
+        </p:spPr>
+      </p:cxnSp>
+      <p:cxnSp>
+        <p:nvCxnSpPr>
+          <p:cNvPr id="49" name="C2-E03 line 47" descr="sci-ppt:o047"/>
+          <p:cNvCxnSpPr/>
+          <p:nvPr/>
+        </p:nvCxnSpPr>
+        <p:spPr>
+          <a:xfrm>
+            <a:off x="11704320" y="1371600"/>
+            <a:ext cx="0" cy="3657600"/>
+          </a:xfrm>
+          <a:prstGeom prst="line">
+            <a:avLst/>
+          </a:prstGeom>
+          <a:ln w="7620">
+            <a:solidFill>
+              <a:srgbClr val="2E4756"/>
+            </a:solidFill>
+          </a:ln>
+          <a:effectLst/>
+        </p:spPr>
+      </p:cxnSp>
+      <p:sp>
+        <p:nvSpPr>
+          <p:cNvPr id="50" name="C2-E03 text 48" descr="sci-ppt:o048"/>
+          <p:cNvSpPr txBox="1"/>
+          <p:nvPr/>
+        </p:nvSpPr>
+        <p:spPr>
+          <a:xfrm>
+            <a:off x="11247120" y="5111496"/>
+            <a:ext cx="914400" cy="208407"/>
+          </a:xfrm>
+          <a:prstGeom prst="rect">
+            <a:avLst/>
+          </a:prstGeom>
+          <a:noFill/>
+          <a:effectLst/>
+        </p:spPr>
+        <p:txBody>
+          <a:bodyPr wrap="none" lIns="18288" rIns="18288" tIns="18288" bIns="18288" anchor="t">
+            <a:spAutoFit/>
+          </a:bodyPr>
+          <a:lstStyle/>
+          <a:p>
+            <a:pPr algn="ctr">
+              <a:spcAft>
+                <a:spcPts val="0"/>
+              </a:spcAft>
+            </a:pPr>
+            <a:r>
+              <a:rPr sz="1050" b="0" i="0">
+                <a:solidFill>
+                  <a:srgbClr val="B4C7D2"/>
+                </a:solidFill>
+                <a:latin typeface="Arial"/>
+              </a:rPr>
+              <a:t>2.5</a:t>
+            </a:r>
+          </a:p>
+        </p:txBody>
+      </p:sp>
+      <p:cxnSp>
+        <p:nvCxnSpPr>
+          <p:cNvPr id="51" name="C2-E03 line 49" descr="sci-ppt:o049"/>
+          <p:cNvCxnSpPr/>
+          <p:nvPr/>
+        </p:nvCxnSpPr>
+        <p:spPr>
+          <a:xfrm>
+            <a:off x="5696712" y="5029200"/>
+            <a:ext cx="64008" cy="0"/>
+          </a:xfrm>
+          <a:prstGeom prst="line">
+            <a:avLst/>
+          </a:prstGeom>
+          <a:ln w="12700">
+            <a:solidFill>
+              <a:srgbClr val="B4C7D2"/>
+            </a:solidFill>
+          </a:ln>
+          <a:effectLst/>
+        </p:spPr>
+      </p:cxnSp>
+      <p:cxnSp>
+        <p:nvCxnSpPr>
+          <p:cNvPr id="52" name="C2-E03 line 50" descr="sci-ppt:o050"/>
+          <p:cNvCxnSpPr/>
+          <p:nvPr/>
+        </p:nvCxnSpPr>
+        <p:spPr>
+          <a:xfrm>
+            <a:off x="5696712" y="4158342"/>
+            <a:ext cx="64008" cy="0"/>
+          </a:xfrm>
+          <a:prstGeom prst="line">
+            <a:avLst/>
+          </a:prstGeom>
+          <a:ln w="12700">
+            <a:solidFill>
+              <a:srgbClr val="B4C7D2"/>
+            </a:solidFill>
+          </a:ln>
+          <a:effectLst/>
+        </p:spPr>
+      </p:cxnSp>
+      <p:cxnSp>
+        <p:nvCxnSpPr>
+          <p:cNvPr id="53" name="C2-E03 line 51" descr="sci-ppt:o051"/>
+          <p:cNvCxnSpPr/>
+          <p:nvPr/>
+        </p:nvCxnSpPr>
+        <p:spPr>
+          <a:xfrm>
+            <a:off x="5760720" y="4158342"/>
+            <a:ext cx="5943600" cy="0"/>
+          </a:xfrm>
+          <a:prstGeom prst="line">
+            <a:avLst/>
+          </a:prstGeom>
+          <a:ln w="7620">
+            <a:solidFill>
+              <a:srgbClr val="2E4756"/>
+            </a:solidFill>
+          </a:ln>
+          <a:effectLst/>
+        </p:spPr>
+      </p:cxnSp>
+      <p:sp>
+        <p:nvSpPr>
+          <p:cNvPr id="54" name="C2-E03 text 52" descr="sci-ppt:o052"/>
+          <p:cNvSpPr txBox="1"/>
+          <p:nvPr/>
+        </p:nvSpPr>
+        <p:spPr>
+          <a:xfrm>
+            <a:off x="4892040" y="4076046"/>
+            <a:ext cx="777240" cy="208407"/>
+          </a:xfrm>
+          <a:prstGeom prst="rect">
+            <a:avLst/>
+          </a:prstGeom>
+          <a:noFill/>
+          <a:effectLst/>
+        </p:spPr>
+        <p:txBody>
+          <a:bodyPr wrap="none" lIns="18288" rIns="18288" tIns="18288" bIns="18288" anchor="t">
+            <a:spAutoFit/>
+          </a:bodyPr>
+          <a:lstStyle/>
+          <a:p>
+            <a:pPr algn="r">
+              <a:spcAft>
+                <a:spcPts val="0"/>
+              </a:spcAft>
+            </a:pPr>
+            <a:r>
+              <a:rPr sz="1050" b="0" i="0">
+                <a:solidFill>
+                  <a:srgbClr val="B4C7D2"/>
+                </a:solidFill>
+                <a:latin typeface="Arial"/>
+              </a:rPr>
+              <a:t>0.25</a:t>
+            </a:r>
+          </a:p>
+        </p:txBody>
+      </p:sp>
+      <p:cxnSp>
+        <p:nvCxnSpPr>
+          <p:cNvPr id="55" name="C2-E03 line 53" descr="sci-ppt:o053"/>
+          <p:cNvCxnSpPr/>
+          <p:nvPr/>
+        </p:nvCxnSpPr>
+        <p:spPr>
+          <a:xfrm>
+            <a:off x="5696712" y="3287485"/>
+            <a:ext cx="64008" cy="0"/>
+          </a:xfrm>
+          <a:prstGeom prst="line">
+            <a:avLst/>
+          </a:prstGeom>
+          <a:ln w="12700">
+            <a:solidFill>
+              <a:srgbClr val="B4C7D2"/>
+            </a:solidFill>
+          </a:ln>
+          <a:effectLst/>
+        </p:spPr>
+      </p:cxnSp>
+      <p:cxnSp>
+        <p:nvCxnSpPr>
+          <p:cNvPr id="56" name="C2-E03 line 54" descr="sci-ppt:o054"/>
+          <p:cNvCxnSpPr/>
+          <p:nvPr/>
+        </p:nvCxnSpPr>
+        <p:spPr>
+          <a:xfrm>
+            <a:off x="5760720" y="3287485"/>
+            <a:ext cx="5943600" cy="0"/>
+          </a:xfrm>
+          <a:prstGeom prst="line">
+            <a:avLst/>
+          </a:prstGeom>
+          <a:ln w="7620">
+            <a:solidFill>
+              <a:srgbClr val="2E4756"/>
+            </a:solidFill>
+          </a:ln>
+          <a:effectLst/>
+        </p:spPr>
+      </p:cxnSp>
+      <p:sp>
+        <p:nvSpPr>
+          <p:cNvPr id="57" name="C2-E03 text 55" descr="sci-ppt:o055"/>
+          <p:cNvSpPr txBox="1"/>
+          <p:nvPr/>
+        </p:nvSpPr>
+        <p:spPr>
+          <a:xfrm>
+            <a:off x="4892040" y="3205189"/>
+            <a:ext cx="777240" cy="208407"/>
+          </a:xfrm>
+          <a:prstGeom prst="rect">
+            <a:avLst/>
+          </a:prstGeom>
+          <a:noFill/>
+          <a:effectLst/>
+        </p:spPr>
+        <p:txBody>
+          <a:bodyPr wrap="none" lIns="18288" rIns="18288" tIns="18288" bIns="18288" anchor="t">
+            <a:spAutoFit/>
+          </a:bodyPr>
+          <a:lstStyle/>
+          <a:p>
+            <a:pPr algn="r">
+              <a:spcAft>
+                <a:spcPts val="0"/>
+              </a:spcAft>
+            </a:pPr>
+            <a:r>
+              <a:rPr sz="1050" b="0" i="0">
+                <a:solidFill>
+                  <a:srgbClr val="B4C7D2"/>
+                </a:solidFill>
+                <a:latin typeface="Arial"/>
+              </a:rPr>
+              <a:t>0.50</a:t>
+            </a:r>
+          </a:p>
+        </p:txBody>
+      </p:sp>
+      <p:cxnSp>
+        <p:nvCxnSpPr>
+          <p:cNvPr id="58" name="C2-E03 line 56" descr="sci-ppt:o056"/>
+          <p:cNvCxnSpPr/>
+          <p:nvPr/>
+        </p:nvCxnSpPr>
+        <p:spPr>
+          <a:xfrm>
+            <a:off x="5696712" y="2416628"/>
+            <a:ext cx="64008" cy="0"/>
+          </a:xfrm>
+          <a:prstGeom prst="line">
+            <a:avLst/>
+          </a:prstGeom>
+          <a:ln w="12700">
+            <a:solidFill>
+              <a:srgbClr val="B4C7D2"/>
+            </a:solidFill>
+          </a:ln>
+          <a:effectLst/>
+        </p:spPr>
+      </p:cxnSp>
+      <p:cxnSp>
+        <p:nvCxnSpPr>
+          <p:cNvPr id="59" name="C2-E03 line 57" descr="sci-ppt:o057"/>
+          <p:cNvCxnSpPr/>
+          <p:nvPr/>
+        </p:nvCxnSpPr>
+        <p:spPr>
+          <a:xfrm>
+            <a:off x="5760720" y="2416628"/>
+            <a:ext cx="5943600" cy="0"/>
+          </a:xfrm>
+          <a:prstGeom prst="line">
+            <a:avLst/>
+          </a:prstGeom>
+          <a:ln w="7620">
+            <a:solidFill>
+              <a:srgbClr val="2E4756"/>
+            </a:solidFill>
+          </a:ln>
+          <a:effectLst/>
+        </p:spPr>
+      </p:cxnSp>
+      <p:sp>
+        <p:nvSpPr>
+          <p:cNvPr id="60" name="C2-E03 text 58" descr="sci-ppt:o058"/>
+          <p:cNvSpPr txBox="1"/>
+          <p:nvPr/>
+        </p:nvSpPr>
+        <p:spPr>
+          <a:xfrm>
+            <a:off x="4892040" y="2334332"/>
+            <a:ext cx="777240" cy="208407"/>
+          </a:xfrm>
+          <a:prstGeom prst="rect">
+            <a:avLst/>
+          </a:prstGeom>
+          <a:noFill/>
+          <a:effectLst/>
+        </p:spPr>
+        <p:txBody>
+          <a:bodyPr wrap="none" lIns="18288" rIns="18288" tIns="18288" bIns="18288" anchor="t">
+            <a:spAutoFit/>
+          </a:bodyPr>
+          <a:lstStyle/>
+          <a:p>
+            <a:pPr algn="r">
+              <a:spcAft>
+                <a:spcPts val="0"/>
+              </a:spcAft>
+            </a:pPr>
+            <a:r>
+              <a:rPr sz="1050" b="0" i="0">
+                <a:solidFill>
+                  <a:srgbClr val="B4C7D2"/>
+                </a:solidFill>
+                <a:latin typeface="Arial"/>
+              </a:rPr>
+              <a:t>0.75</a:t>
+            </a:r>
+          </a:p>
+        </p:txBody>
+      </p:sp>
+      <p:cxnSp>
+        <p:nvCxnSpPr>
+          <p:cNvPr id="61" name="C2-E03 line 59" descr="sci-ppt:o059"/>
+          <p:cNvCxnSpPr/>
+          <p:nvPr/>
+        </p:nvCxnSpPr>
+        <p:spPr>
+          <a:xfrm>
+            <a:off x="5696712" y="1545771"/>
+            <a:ext cx="64008" cy="0"/>
+          </a:xfrm>
+          <a:prstGeom prst="line">
+            <a:avLst/>
+          </a:prstGeom>
+          <a:ln w="12700">
+            <a:solidFill>
+              <a:srgbClr val="B4C7D2"/>
+            </a:solidFill>
+          </a:ln>
+          <a:effectLst/>
+        </p:spPr>
+      </p:cxnSp>
+      <p:cxnSp>
+        <p:nvCxnSpPr>
+          <p:cNvPr id="62" name="C2-E03 line 60" descr="sci-ppt:o060"/>
+          <p:cNvCxnSpPr/>
+          <p:nvPr/>
+        </p:nvCxnSpPr>
+        <p:spPr>
+          <a:xfrm>
+            <a:off x="5760720" y="1545771"/>
+            <a:ext cx="5943600" cy="0"/>
+          </a:xfrm>
+          <a:prstGeom prst="line">
+            <a:avLst/>
+          </a:prstGeom>
+          <a:ln w="7620">
+            <a:solidFill>
+              <a:srgbClr val="2E4756"/>
+            </a:solidFill>
+          </a:ln>
+          <a:effectLst/>
+        </p:spPr>
+      </p:cxnSp>
+      <p:sp>
+        <p:nvSpPr>
+          <p:cNvPr id="63" name="C2-E03 text 61" descr="sci-ppt:o061"/>
+          <p:cNvSpPr txBox="1"/>
+          <p:nvPr/>
+        </p:nvSpPr>
+        <p:spPr>
+          <a:xfrm>
+            <a:off x="4892040" y="1463475"/>
+            <a:ext cx="777240" cy="208407"/>
+          </a:xfrm>
+          <a:prstGeom prst="rect">
+            <a:avLst/>
+          </a:prstGeom>
+          <a:noFill/>
+          <a:effectLst/>
+        </p:spPr>
+        <p:txBody>
+          <a:bodyPr wrap="none" lIns="18288" rIns="18288" tIns="18288" bIns="18288" anchor="t">
+            <a:spAutoFit/>
+          </a:bodyPr>
+          <a:lstStyle/>
+          <a:p>
+            <a:pPr algn="r">
+              <a:spcAft>
+                <a:spcPts val="0"/>
+              </a:spcAft>
+            </a:pPr>
+            <a:r>
+              <a:rPr sz="1050" b="0" i="0">
+                <a:solidFill>
+                  <a:srgbClr val="B4C7D2"/>
+                </a:solidFill>
+                <a:latin typeface="Arial"/>
+              </a:rPr>
+              <a:t>1.00</a:t>
+            </a:r>
+          </a:p>
+        </p:txBody>
+      </p:sp>
+      <p:sp>
+        <p:nvSpPr>
+          <p:cNvPr id="64" name="C2-E03 text 62" descr="sci-ppt:o062"/>
+          <p:cNvSpPr txBox="1"/>
+          <p:nvPr/>
+        </p:nvSpPr>
+        <p:spPr>
+          <a:xfrm>
+            <a:off x="5760720" y="5312664"/>
+            <a:ext cx="5943600" cy="231648"/>
+          </a:xfrm>
+          <a:prstGeom prst="rect">
+            <a:avLst/>
+          </a:prstGeom>
+          <a:noFill/>
+          <a:effectLst/>
+        </p:spPr>
+        <p:txBody>
+          <a:bodyPr wrap="none" lIns="18288" rIns="18288" tIns="18288" bIns="18288" anchor="t">
+            <a:spAutoFit/>
+          </a:bodyPr>
+          <a:lstStyle/>
+          <a:p>
+            <a:pPr algn="ctr">
+              <a:spcAft>
+                <a:spcPts val="0"/>
+              </a:spcAft>
+            </a:pPr>
+            <a:r>
+              <a:rPr sz="1200" b="0" i="0">
+                <a:solidFill>
+                  <a:srgbClr val="E7F0F3"/>
+                </a:solidFill>
+                <a:latin typeface="Arial"/>
+              </a:rPr>
+              <a:t>bₐ / w</a:t>
+            </a:r>
+          </a:p>
+        </p:txBody>
+      </p:sp>
+      <p:sp>
+        <p:nvSpPr>
+          <p:cNvPr id="65" name="C2-E03 text 63" descr="sci-ppt:o063"/>
+          <p:cNvSpPr txBox="1"/>
+          <p:nvPr/>
+        </p:nvSpPr>
+        <p:spPr>
+          <a:xfrm>
+            <a:off x="5212080" y="1024128"/>
+            <a:ext cx="5943600" cy="231648"/>
+          </a:xfrm>
+          <a:prstGeom prst="rect">
+            <a:avLst/>
+          </a:prstGeom>
+          <a:noFill/>
+          <a:effectLst/>
+        </p:spPr>
+        <p:txBody>
+          <a:bodyPr wrap="none" lIns="18288" rIns="18288" tIns="18288" bIns="18288" anchor="t">
             <a:spAutoFit/>
           </a:bodyPr>
           <a:lstStyle/>
@@ -3377,27 +5121,550 @@
               </a:spcAft>
             </a:pPr>
             <a:r>
-              <a:rPr sz="1632" b="0" i="0">
+              <a:rPr sz="1200" b="0" i="0">
                 <a:solidFill>
                   <a:srgbClr val="E7F0F3"/>
                 </a:solidFill>
                 <a:latin typeface="Arial"/>
               </a:rPr>
-              <a:t>r / w</a:t>
-            </a:r>
-          </a:p>
-        </p:txBody>
-      </p:sp>
-      <p:sp>
-        <p:nvSpPr>
-          <p:cNvPr id="11" name="text10" descr="sci-ppt:C2-E03-010"/>
+              <a:t>f_geo</a:t>
+            </a:r>
+          </a:p>
+        </p:txBody>
+      </p:sp>
+      <p:sp>
+        <p:nvSpPr>
+          <p:cNvPr id="66" name="C2-E03 polygon 64" descr="sci-ppt:o064"/>
+          <p:cNvSpPr/>
+          <p:nvPr/>
+        </p:nvSpPr>
+        <p:spPr>
+          <a:xfrm>
+            <a:off x="5760720" y="1545784"/>
+            <a:ext cx="5943600" cy="3483416"/>
+          </a:xfrm>
+          <a:custGeom>
+            <a:avLst/>
+            <a:gdLst/>
+            <a:ahLst/>
+            <a:cxnLst/>
+            <a:rect l="l" t="t" r="r" b="b"/>
+            <a:pathLst>
+              <a:path w="5943600" h="3483416">
+                <a:moveTo>
+                  <a:pt x="0" y="3483416"/>
+                </a:moveTo>
+                <a:lnTo>
+                  <a:pt x="39756" y="3481468"/>
+                </a:lnTo>
+                <a:lnTo>
+                  <a:pt x="79513" y="3475631"/>
+                </a:lnTo>
+                <a:lnTo>
+                  <a:pt x="119269" y="3465926"/>
+                </a:lnTo>
+                <a:lnTo>
+                  <a:pt x="159026" y="3452383"/>
+                </a:lnTo>
+                <a:lnTo>
+                  <a:pt x="198782" y="3435049"/>
+                </a:lnTo>
+                <a:lnTo>
+                  <a:pt x="238539" y="3413981"/>
+                </a:lnTo>
+                <a:lnTo>
+                  <a:pt x="278295" y="3389250"/>
+                </a:lnTo>
+                <a:lnTo>
+                  <a:pt x="318052" y="3360936"/>
+                </a:lnTo>
+                <a:lnTo>
+                  <a:pt x="357808" y="3329132"/>
+                </a:lnTo>
+                <a:lnTo>
+                  <a:pt x="397565" y="3293943"/>
+                </a:lnTo>
+                <a:lnTo>
+                  <a:pt x="437321" y="3255482"/>
+                </a:lnTo>
+                <a:lnTo>
+                  <a:pt x="477078" y="3213874"/>
+                </a:lnTo>
+                <a:lnTo>
+                  <a:pt x="516834" y="3169250"/>
+                </a:lnTo>
+                <a:lnTo>
+                  <a:pt x="556591" y="3121752"/>
+                </a:lnTo>
+                <a:lnTo>
+                  <a:pt x="596347" y="3071528"/>
+                </a:lnTo>
+                <a:lnTo>
+                  <a:pt x="636104" y="3018734"/>
+                </a:lnTo>
+                <a:lnTo>
+                  <a:pt x="675860" y="2963531"/>
+                </a:lnTo>
+                <a:lnTo>
+                  <a:pt x="715617" y="2906084"/>
+                </a:lnTo>
+                <a:lnTo>
+                  <a:pt x="755373" y="2846565"/>
+                </a:lnTo>
+                <a:lnTo>
+                  <a:pt x="795130" y="2785148"/>
+                </a:lnTo>
+                <a:lnTo>
+                  <a:pt x="834886" y="2722010"/>
+                </a:lnTo>
+                <a:lnTo>
+                  <a:pt x="874643" y="2657329"/>
+                </a:lnTo>
+                <a:lnTo>
+                  <a:pt x="914400" y="2591285"/>
+                </a:lnTo>
+                <a:lnTo>
+                  <a:pt x="954156" y="2524058"/>
+                </a:lnTo>
+                <a:lnTo>
+                  <a:pt x="993913" y="2455826"/>
+                </a:lnTo>
+                <a:lnTo>
+                  <a:pt x="1033669" y="2386767"/>
+                </a:lnTo>
+                <a:lnTo>
+                  <a:pt x="1073426" y="2317057"/>
+                </a:lnTo>
+                <a:lnTo>
+                  <a:pt x="1113182" y="2246868"/>
+                </a:lnTo>
+                <a:lnTo>
+                  <a:pt x="1152939" y="2176370"/>
+                </a:lnTo>
+                <a:lnTo>
+                  <a:pt x="1192695" y="2105727"/>
+                </a:lnTo>
+                <a:lnTo>
+                  <a:pt x="1232452" y="2035099"/>
+                </a:lnTo>
+                <a:lnTo>
+                  <a:pt x="1272208" y="1964642"/>
+                </a:lnTo>
+                <a:lnTo>
+                  <a:pt x="1311965" y="1894503"/>
+                </a:lnTo>
+                <a:lnTo>
+                  <a:pt x="1351721" y="1824826"/>
+                </a:lnTo>
+                <a:lnTo>
+                  <a:pt x="1391478" y="1755747"/>
+                </a:lnTo>
+                <a:lnTo>
+                  <a:pt x="1431234" y="1687394"/>
+                </a:lnTo>
+                <a:lnTo>
+                  <a:pt x="1470991" y="1619889"/>
+                </a:lnTo>
+                <a:lnTo>
+                  <a:pt x="1510747" y="1553346"/>
+                </a:lnTo>
+                <a:lnTo>
+                  <a:pt x="1550504" y="1487872"/>
+                </a:lnTo>
+                <a:lnTo>
+                  <a:pt x="1590260" y="1423564"/>
+                </a:lnTo>
+                <a:lnTo>
+                  <a:pt x="1630017" y="1360512"/>
+                </a:lnTo>
+                <a:lnTo>
+                  <a:pt x="1669773" y="1298800"/>
+                </a:lnTo>
+                <a:lnTo>
+                  <a:pt x="1709530" y="1238501"/>
+                </a:lnTo>
+                <a:lnTo>
+                  <a:pt x="1749286" y="1179681"/>
+                </a:lnTo>
+                <a:lnTo>
+                  <a:pt x="1789043" y="1122398"/>
+                </a:lnTo>
+                <a:lnTo>
+                  <a:pt x="1828799" y="1066703"/>
+                </a:lnTo>
+                <a:lnTo>
+                  <a:pt x="1868556" y="1012639"/>
+                </a:lnTo>
+                <a:lnTo>
+                  <a:pt x="1908313" y="960239"/>
+                </a:lnTo>
+                <a:lnTo>
+                  <a:pt x="1948069" y="909533"/>
+                </a:lnTo>
+                <a:lnTo>
+                  <a:pt x="1987826" y="860542"/>
+                </a:lnTo>
+                <a:lnTo>
+                  <a:pt x="2027582" y="813279"/>
+                </a:lnTo>
+                <a:lnTo>
+                  <a:pt x="2067339" y="767753"/>
+                </a:lnTo>
+                <a:lnTo>
+                  <a:pt x="2107095" y="723965"/>
+                </a:lnTo>
+                <a:lnTo>
+                  <a:pt x="2146852" y="681911"/>
+                </a:lnTo>
+                <a:lnTo>
+                  <a:pt x="2186608" y="641582"/>
+                </a:lnTo>
+                <a:lnTo>
+                  <a:pt x="2226365" y="602963"/>
+                </a:lnTo>
+                <a:lnTo>
+                  <a:pt x="2266121" y="566035"/>
+                </a:lnTo>
+                <a:lnTo>
+                  <a:pt x="2305878" y="530774"/>
+                </a:lnTo>
+                <a:lnTo>
+                  <a:pt x="2345634" y="497154"/>
+                </a:lnTo>
+                <a:lnTo>
+                  <a:pt x="2385391" y="465143"/>
+                </a:lnTo>
+                <a:lnTo>
+                  <a:pt x="2425147" y="434706"/>
+                </a:lnTo>
+                <a:lnTo>
+                  <a:pt x="2464904" y="405806"/>
+                </a:lnTo>
+                <a:lnTo>
+                  <a:pt x="2504660" y="378405"/>
+                </a:lnTo>
+                <a:lnTo>
+                  <a:pt x="2544417" y="352459"/>
+                </a:lnTo>
+                <a:lnTo>
+                  <a:pt x="2584173" y="327925"/>
+                </a:lnTo>
+                <a:lnTo>
+                  <a:pt x="2623930" y="304757"/>
+                </a:lnTo>
+                <a:lnTo>
+                  <a:pt x="2663686" y="282910"/>
+                </a:lnTo>
+                <a:lnTo>
+                  <a:pt x="2703443" y="262335"/>
+                </a:lnTo>
+                <a:lnTo>
+                  <a:pt x="2743200" y="242984"/>
+                </a:lnTo>
+                <a:lnTo>
+                  <a:pt x="2782956" y="224809"/>
+                </a:lnTo>
+                <a:lnTo>
+                  <a:pt x="2822713" y="207761"/>
+                </a:lnTo>
+                <a:lnTo>
+                  <a:pt x="2862469" y="191791"/>
+                </a:lnTo>
+                <a:lnTo>
+                  <a:pt x="2902226" y="176851"/>
+                </a:lnTo>
+                <a:lnTo>
+                  <a:pt x="2941982" y="162892"/>
+                </a:lnTo>
+                <a:lnTo>
+                  <a:pt x="2981739" y="149867"/>
+                </a:lnTo>
+                <a:lnTo>
+                  <a:pt x="3021495" y="137729"/>
+                </a:lnTo>
+                <a:lnTo>
+                  <a:pt x="3061252" y="126433"/>
+                </a:lnTo>
+                <a:lnTo>
+                  <a:pt x="3101008" y="115933"/>
+                </a:lnTo>
+                <a:lnTo>
+                  <a:pt x="3140765" y="106186"/>
+                </a:lnTo>
+                <a:lnTo>
+                  <a:pt x="3180521" y="97150"/>
+                </a:lnTo>
+                <a:lnTo>
+                  <a:pt x="3220278" y="88784"/>
+                </a:lnTo>
+                <a:lnTo>
+                  <a:pt x="3260034" y="81047"/>
+                </a:lnTo>
+                <a:lnTo>
+                  <a:pt x="3299791" y="73901"/>
+                </a:lnTo>
+                <a:lnTo>
+                  <a:pt x="3339547" y="67310"/>
+                </a:lnTo>
+                <a:lnTo>
+                  <a:pt x="3379304" y="61239"/>
+                </a:lnTo>
+                <a:lnTo>
+                  <a:pt x="3419060" y="55652"/>
+                </a:lnTo>
+                <a:lnTo>
+                  <a:pt x="3458817" y="50518"/>
+                </a:lnTo>
+                <a:lnTo>
+                  <a:pt x="3498573" y="45807"/>
+                </a:lnTo>
+                <a:lnTo>
+                  <a:pt x="3538330" y="41489"/>
+                </a:lnTo>
+                <a:lnTo>
+                  <a:pt x="3578086" y="37535"/>
+                </a:lnTo>
+                <a:lnTo>
+                  <a:pt x="3617843" y="33920"/>
+                </a:lnTo>
+                <a:lnTo>
+                  <a:pt x="3657599" y="30619"/>
+                </a:lnTo>
+                <a:lnTo>
+                  <a:pt x="3697356" y="27608"/>
+                </a:lnTo>
+                <a:lnTo>
+                  <a:pt x="3737113" y="24865"/>
+                </a:lnTo>
+                <a:lnTo>
+                  <a:pt x="3776869" y="22370"/>
+                </a:lnTo>
+                <a:lnTo>
+                  <a:pt x="3816626" y="20102"/>
+                </a:lnTo>
+                <a:lnTo>
+                  <a:pt x="3856382" y="18044"/>
+                </a:lnTo>
+                <a:lnTo>
+                  <a:pt x="3896139" y="16178"/>
+                </a:lnTo>
+                <a:lnTo>
+                  <a:pt x="3935895" y="14489"/>
+                </a:lnTo>
+                <a:lnTo>
+                  <a:pt x="3975652" y="12962"/>
+                </a:lnTo>
+                <a:lnTo>
+                  <a:pt x="4015408" y="11582"/>
+                </a:lnTo>
+                <a:lnTo>
+                  <a:pt x="4055165" y="10338"/>
+                </a:lnTo>
+                <a:lnTo>
+                  <a:pt x="4094921" y="9216"/>
+                </a:lnTo>
+                <a:lnTo>
+                  <a:pt x="4134678" y="8207"/>
+                </a:lnTo>
+                <a:lnTo>
+                  <a:pt x="4174434" y="7301"/>
+                </a:lnTo>
+                <a:lnTo>
+                  <a:pt x="4214191" y="6486"/>
+                </a:lnTo>
+                <a:lnTo>
+                  <a:pt x="4253947" y="5757"/>
+                </a:lnTo>
+                <a:lnTo>
+                  <a:pt x="4293704" y="5103"/>
+                </a:lnTo>
+                <a:lnTo>
+                  <a:pt x="4333460" y="4518"/>
+                </a:lnTo>
+                <a:lnTo>
+                  <a:pt x="4373217" y="3996"/>
+                </a:lnTo>
+                <a:lnTo>
+                  <a:pt x="4412973" y="3530"/>
+                </a:lnTo>
+                <a:lnTo>
+                  <a:pt x="4452730" y="3114"/>
+                </a:lnTo>
+                <a:lnTo>
+                  <a:pt x="4492486" y="2745"/>
+                </a:lnTo>
+                <a:lnTo>
+                  <a:pt x="4532243" y="2416"/>
+                </a:lnTo>
+                <a:lnTo>
+                  <a:pt x="4572000" y="2124"/>
+                </a:lnTo>
+                <a:lnTo>
+                  <a:pt x="4611756" y="1865"/>
+                </a:lnTo>
+                <a:lnTo>
+                  <a:pt x="4651513" y="1635"/>
+                </a:lnTo>
+                <a:lnTo>
+                  <a:pt x="4691269" y="1432"/>
+                </a:lnTo>
+                <a:lnTo>
+                  <a:pt x="4731026" y="1253"/>
+                </a:lnTo>
+                <a:lnTo>
+                  <a:pt x="4770782" y="1095"/>
+                </a:lnTo>
+                <a:lnTo>
+                  <a:pt x="4810539" y="955"/>
+                </a:lnTo>
+                <a:lnTo>
+                  <a:pt x="4850295" y="832"/>
+                </a:lnTo>
+                <a:lnTo>
+                  <a:pt x="4890052" y="724"/>
+                </a:lnTo>
+                <a:lnTo>
+                  <a:pt x="4929808" y="629"/>
+                </a:lnTo>
+                <a:lnTo>
+                  <a:pt x="4969565" y="545"/>
+                </a:lnTo>
+                <a:lnTo>
+                  <a:pt x="5009321" y="472"/>
+                </a:lnTo>
+                <a:lnTo>
+                  <a:pt x="5049078" y="408"/>
+                </a:lnTo>
+                <a:lnTo>
+                  <a:pt x="5088834" y="352"/>
+                </a:lnTo>
+                <a:lnTo>
+                  <a:pt x="5128591" y="303"/>
+                </a:lnTo>
+                <a:lnTo>
+                  <a:pt x="5168347" y="261"/>
+                </a:lnTo>
+                <a:lnTo>
+                  <a:pt x="5208104" y="223"/>
+                </a:lnTo>
+                <a:lnTo>
+                  <a:pt x="5247860" y="191"/>
+                </a:lnTo>
+                <a:lnTo>
+                  <a:pt x="5287617" y="163"/>
+                </a:lnTo>
+                <a:lnTo>
+                  <a:pt x="5327373" y="139"/>
+                </a:lnTo>
+                <a:lnTo>
+                  <a:pt x="5367130" y="117"/>
+                </a:lnTo>
+                <a:lnTo>
+                  <a:pt x="5406886" y="99"/>
+                </a:lnTo>
+                <a:lnTo>
+                  <a:pt x="5446643" y="83"/>
+                </a:lnTo>
+                <a:lnTo>
+                  <a:pt x="5486400" y="69"/>
+                </a:lnTo>
+                <a:lnTo>
+                  <a:pt x="5526156" y="58"/>
+                </a:lnTo>
+                <a:lnTo>
+                  <a:pt x="5565913" y="47"/>
+                </a:lnTo>
+                <a:lnTo>
+                  <a:pt x="5605669" y="39"/>
+                </a:lnTo>
+                <a:lnTo>
+                  <a:pt x="5645426" y="31"/>
+                </a:lnTo>
+                <a:lnTo>
+                  <a:pt x="5685182" y="25"/>
+                </a:lnTo>
+                <a:lnTo>
+                  <a:pt x="5724939" y="19"/>
+                </a:lnTo>
+                <a:lnTo>
+                  <a:pt x="5764695" y="14"/>
+                </a:lnTo>
+                <a:lnTo>
+                  <a:pt x="5804452" y="10"/>
+                </a:lnTo>
+                <a:lnTo>
+                  <a:pt x="5844208" y="7"/>
+                </a:lnTo>
+                <a:lnTo>
+                  <a:pt x="5883965" y="4"/>
+                </a:lnTo>
+                <a:lnTo>
+                  <a:pt x="5923721" y="1"/>
+                </a:lnTo>
+                <a:lnTo>
+                  <a:pt x="5943600" y="0"/>
+                </a:lnTo>
+              </a:path>
+            </a:pathLst>
+          </a:custGeom>
+          <a:noFill/>
+          <a:ln w="38100">
+            <a:solidFill>
+              <a:srgbClr val="8EDBD4"/>
+            </a:solidFill>
+          </a:ln>
+          <a:effectLst/>
+        </p:spPr>
+        <p:txBody>
+          <a:bodyPr rtlCol="0" anchor="ctr"/>
+          <a:lstStyle/>
+          <a:p>
+            <a:pPr algn="ctr"/>
+          </a:p>
+        </p:txBody>
+      </p:sp>
+      <p:sp>
+        <p:nvSpPr>
+          <p:cNvPr id="67" name="C2-E03 ellipse 65" descr="sci-ppt:o065"/>
+          <p:cNvSpPr/>
+          <p:nvPr/>
+        </p:nvSpPr>
+        <p:spPr>
+          <a:xfrm>
+            <a:off x="6876288" y="3585425"/>
+            <a:ext cx="146304" cy="146304"/>
+          </a:xfrm>
+          <a:prstGeom prst="ellipse">
+            <a:avLst/>
+          </a:prstGeom>
+          <a:solidFill>
+            <a:srgbClr val="F28BA0"/>
+          </a:solidFill>
+          <a:ln w="12700">
+            <a:solidFill>
+              <a:srgbClr val="F28BA0"/>
+            </a:solidFill>
+          </a:ln>
+          <a:effectLst/>
+        </p:spPr>
+        <p:txBody>
+          <a:bodyPr rtlCol="0" anchor="ctr"/>
+          <a:lstStyle/>
+          <a:p>
+            <a:pPr algn="ctr"/>
+          </a:p>
+        </p:txBody>
+      </p:sp>
+      <p:sp>
+        <p:nvSpPr>
+          <p:cNvPr id="68" name="C2-E03 text 66" descr="sci-ppt:o066"/>
           <p:cNvSpPr txBox="1"/>
           <p:nvPr/>
         </p:nvSpPr>
         <p:spPr>
           <a:xfrm>
-            <a:off x="6461760" y="1036320"/>
-            <a:ext cx="3657600" cy="321259"/>
+            <a:off x="7040879" y="3247097"/>
+            <a:ext cx="914400" cy="239395"/>
           </a:xfrm>
           <a:prstGeom prst="rect">
             <a:avLst/>
@@ -3406,7 +5673,7 @@
           <a:effectLst/>
         </p:spPr>
         <p:txBody>
-          <a:bodyPr wrap="none" lIns="27432" rIns="27432" tIns="18288" bIns="18288" anchor="ctr">
+          <a:bodyPr wrap="none" lIns="18288" rIns="18288" tIns="18288" bIns="18288" anchor="t">
             <a:spAutoFit/>
           </a:bodyPr>
           <a:lstStyle/>
@@ -3417,919 +5684,199 @@
               </a:spcAft>
             </a:pPr>
             <a:r>
-              <a:rPr sz="1632" b="0" i="0">
+              <a:rPr sz="1250" b="0" i="0">
+                <a:solidFill>
+                  <a:srgbClr val="F28BA0"/>
+                </a:solidFill>
+                <a:latin typeface="Arial"/>
+              </a:rPr>
+              <a:t>0.393</a:t>
+            </a:r>
+          </a:p>
+        </p:txBody>
+      </p:sp>
+      <p:sp>
+        <p:nvSpPr>
+          <p:cNvPr id="69" name="C2-E03 ellipse 67" descr="sci-ppt:o067"/>
+          <p:cNvSpPr/>
+          <p:nvPr/>
+        </p:nvSpPr>
+        <p:spPr>
+          <a:xfrm>
+            <a:off x="8065008" y="1944050"/>
+            <a:ext cx="146304" cy="146304"/>
+          </a:xfrm>
+          <a:prstGeom prst="ellipse">
+            <a:avLst/>
+          </a:prstGeom>
+          <a:solidFill>
+            <a:srgbClr val="F2B880"/>
+          </a:solidFill>
+          <a:ln w="12700">
+            <a:solidFill>
+              <a:srgbClr val="F2B880"/>
+            </a:solidFill>
+          </a:ln>
+          <a:effectLst/>
+        </p:spPr>
+        <p:txBody>
+          <a:bodyPr rtlCol="0" anchor="ctr"/>
+          <a:lstStyle/>
+          <a:p>
+            <a:pPr algn="ctr"/>
+          </a:p>
+        </p:txBody>
+      </p:sp>
+      <p:sp>
+        <p:nvSpPr>
+          <p:cNvPr id="70" name="C2-E03 text 68" descr="sci-ppt:o068"/>
+          <p:cNvSpPr txBox="1"/>
+          <p:nvPr/>
+        </p:nvSpPr>
+        <p:spPr>
+          <a:xfrm>
+            <a:off x="8229600" y="2062922"/>
+            <a:ext cx="914400" cy="239395"/>
+          </a:xfrm>
+          <a:prstGeom prst="rect">
+            <a:avLst/>
+          </a:prstGeom>
+          <a:noFill/>
+          <a:effectLst/>
+        </p:spPr>
+        <p:txBody>
+          <a:bodyPr wrap="none" lIns="18288" rIns="18288" tIns="18288" bIns="18288" anchor="t">
+            <a:spAutoFit/>
+          </a:bodyPr>
+          <a:lstStyle/>
+          <a:p>
+            <a:pPr algn="l">
+              <a:spcAft>
+                <a:spcPts val="0"/>
+              </a:spcAft>
+            </a:pPr>
+            <a:r>
+              <a:rPr sz="1250" b="0" i="0">
+                <a:solidFill>
+                  <a:srgbClr val="F2B880"/>
+                </a:solidFill>
+                <a:latin typeface="Arial"/>
+              </a:rPr>
+              <a:t>0.865</a:t>
+            </a:r>
+          </a:p>
+        </p:txBody>
+      </p:sp>
+      <p:sp>
+        <p:nvSpPr>
+          <p:cNvPr id="71" name="C2-E03 ellipse 69" descr="sci-ppt:o069"/>
+          <p:cNvSpPr/>
+          <p:nvPr/>
+        </p:nvSpPr>
+        <p:spPr>
+          <a:xfrm>
+            <a:off x="9253728" y="1511316"/>
+            <a:ext cx="146304" cy="146304"/>
+          </a:xfrm>
+          <a:prstGeom prst="ellipse">
+            <a:avLst/>
+          </a:prstGeom>
+          <a:solidFill>
+            <a:srgbClr val="7FC8F8"/>
+          </a:solidFill>
+          <a:ln w="12700">
+            <a:solidFill>
+              <a:srgbClr val="7FC8F8"/>
+            </a:solidFill>
+          </a:ln>
+          <a:effectLst/>
+        </p:spPr>
+        <p:txBody>
+          <a:bodyPr rtlCol="0" anchor="ctr"/>
+          <a:lstStyle/>
+          <a:p>
+            <a:pPr algn="ctr"/>
+          </a:p>
+        </p:txBody>
+      </p:sp>
+      <p:sp>
+        <p:nvSpPr>
+          <p:cNvPr id="72" name="C2-E03 text 70" descr="sci-ppt:o070"/>
+          <p:cNvSpPr txBox="1"/>
+          <p:nvPr/>
+        </p:nvSpPr>
+        <p:spPr>
+          <a:xfrm>
+            <a:off x="9418319" y="1630188"/>
+            <a:ext cx="914400" cy="239395"/>
+          </a:xfrm>
+          <a:prstGeom prst="rect">
+            <a:avLst/>
+          </a:prstGeom>
+          <a:noFill/>
+          <a:effectLst/>
+        </p:spPr>
+        <p:txBody>
+          <a:bodyPr wrap="none" lIns="18288" rIns="18288" tIns="18288" bIns="18288" anchor="t">
+            <a:spAutoFit/>
+          </a:bodyPr>
+          <a:lstStyle/>
+          <a:p>
+            <a:pPr algn="l">
+              <a:spcAft>
+                <a:spcPts val="0"/>
+              </a:spcAft>
+            </a:pPr>
+            <a:r>
+              <a:rPr sz="1250" b="0" i="0">
+                <a:solidFill>
+                  <a:srgbClr val="7FC8F8"/>
+                </a:solidFill>
+                <a:latin typeface="Arial"/>
+              </a:rPr>
+              <a:t>0.989</a:t>
+            </a:r>
+          </a:p>
+        </p:txBody>
+      </p:sp>
+      <p:sp>
+        <p:nvSpPr>
+          <p:cNvPr id="73" name="C2-E03 text 71" descr="sci-ppt:o071"/>
+          <p:cNvSpPr txBox="1"/>
+          <p:nvPr/>
+        </p:nvSpPr>
+        <p:spPr>
+          <a:xfrm>
+            <a:off x="5760720" y="5733288"/>
+            <a:ext cx="5943600" cy="448563"/>
+          </a:xfrm>
+          <a:prstGeom prst="rect">
+            <a:avLst/>
+          </a:prstGeom>
+          <a:noFill/>
+          <a:effectLst/>
+        </p:spPr>
+        <p:txBody>
+          <a:bodyPr wrap="none" lIns="18288" rIns="18288" tIns="18288" bIns="18288" anchor="t">
+            <a:spAutoFit/>
+          </a:bodyPr>
+          <a:lstStyle/>
+          <a:p>
+            <a:pPr algn="l">
+              <a:spcAft>
+                <a:spcPts val="0"/>
+              </a:spcAft>
+            </a:pPr>
+            <a:r>
+              <a:rPr sz="1300" b="1" i="0">
                 <a:solidFill>
                   <a:srgbClr val="E7F0F3"/>
                 </a:solidFill>
                 <a:latin typeface="Arial"/>
               </a:rPr>
-              <a:t>F / F0</a:t>
-            </a:r>
-          </a:p>
-        </p:txBody>
-      </p:sp>
-      <p:cxnSp>
-        <p:nvCxnSpPr>
-          <p:cNvPr id="12" name="line11" descr="sci-ppt:C2-E03-011"/>
-          <p:cNvCxnSpPr/>
-          <p:nvPr/>
-        </p:nvCxnSpPr>
-        <p:spPr>
-          <a:xfrm>
-            <a:off x="6644640" y="1524000"/>
-            <a:ext cx="103632" cy="12161"/>
-          </a:xfrm>
-          <a:prstGeom prst="line">
-            <a:avLst/>
-          </a:prstGeom>
-          <a:ln w="25400">
-            <a:solidFill>
-              <a:srgbClr val="8EDBD4"/>
-            </a:solidFill>
-          </a:ln>
-          <a:effectLst/>
-        </p:spPr>
-      </p:cxnSp>
-      <p:cxnSp>
-        <p:nvCxnSpPr>
-          <p:cNvPr id="13" name="line12" descr="sci-ppt:C2-E03-012"/>
-          <p:cNvCxnSpPr/>
-          <p:nvPr/>
-        </p:nvCxnSpPr>
-        <p:spPr>
-          <a:xfrm>
-            <a:off x="6748272" y="1536161"/>
-            <a:ext cx="103632" cy="36122"/>
-          </a:xfrm>
-          <a:prstGeom prst="line">
-            <a:avLst/>
-          </a:prstGeom>
-          <a:ln w="25400">
-            <a:solidFill>
-              <a:srgbClr val="8EDBD4"/>
-            </a:solidFill>
-          </a:ln>
-          <a:effectLst/>
-        </p:spPr>
-      </p:cxnSp>
-      <p:cxnSp>
-        <p:nvCxnSpPr>
-          <p:cNvPr id="14" name="line13" descr="sci-ppt:C2-E03-013"/>
-          <p:cNvCxnSpPr/>
-          <p:nvPr/>
-        </p:nvCxnSpPr>
-        <p:spPr>
-          <a:xfrm>
-            <a:off x="6851904" y="1572283"/>
-            <a:ext cx="103632" cy="59012"/>
-          </a:xfrm>
-          <a:prstGeom prst="line">
-            <a:avLst/>
-          </a:prstGeom>
-          <a:ln w="25400">
-            <a:solidFill>
-              <a:srgbClr val="8EDBD4"/>
-            </a:solidFill>
-          </a:ln>
-          <a:effectLst/>
-        </p:spPr>
-      </p:cxnSp>
-      <p:cxnSp>
-        <p:nvCxnSpPr>
-          <p:cNvPr id="15" name="line14" descr="sci-ppt:C2-E03-014"/>
-          <p:cNvCxnSpPr/>
-          <p:nvPr/>
-        </p:nvCxnSpPr>
-        <p:spPr>
-          <a:xfrm>
-            <a:off x="6955536" y="1631295"/>
-            <a:ext cx="103632" cy="80178"/>
-          </a:xfrm>
-          <a:prstGeom prst="line">
-            <a:avLst/>
-          </a:prstGeom>
-          <a:ln w="25400">
-            <a:solidFill>
-              <a:srgbClr val="8EDBD4"/>
-            </a:solidFill>
-          </a:ln>
-          <a:effectLst/>
-        </p:spPr>
-      </p:cxnSp>
-      <p:cxnSp>
-        <p:nvCxnSpPr>
-          <p:cNvPr id="16" name="line15" descr="sci-ppt:C2-E03-015"/>
-          <p:cNvCxnSpPr/>
-          <p:nvPr/>
-        </p:nvCxnSpPr>
-        <p:spPr>
-          <a:xfrm>
-            <a:off x="7059168" y="1711473"/>
-            <a:ext cx="103632" cy="99046"/>
-          </a:xfrm>
-          <a:prstGeom prst="line">
-            <a:avLst/>
-          </a:prstGeom>
-          <a:ln w="25400">
-            <a:solidFill>
-              <a:srgbClr val="8EDBD4"/>
-            </a:solidFill>
-          </a:ln>
-          <a:effectLst/>
-        </p:spPr>
-      </p:cxnSp>
-      <p:cxnSp>
-        <p:nvCxnSpPr>
-          <p:cNvPr id="17" name="line16" descr="sci-ppt:C2-E03-016"/>
-          <p:cNvCxnSpPr/>
-          <p:nvPr/>
-        </p:nvCxnSpPr>
-        <p:spPr>
-          <a:xfrm>
-            <a:off x="7162800" y="1810519"/>
-            <a:ext cx="103632" cy="115158"/>
-          </a:xfrm>
-          <a:prstGeom prst="line">
-            <a:avLst/>
-          </a:prstGeom>
-          <a:ln w="25400">
-            <a:solidFill>
-              <a:srgbClr val="8EDBD4"/>
-            </a:solidFill>
-          </a:ln>
-          <a:effectLst/>
-        </p:spPr>
-      </p:cxnSp>
-      <p:cxnSp>
-        <p:nvCxnSpPr>
-          <p:cNvPr id="18" name="line17" descr="sci-ppt:C2-E03-017"/>
-          <p:cNvCxnSpPr/>
-          <p:nvPr/>
-        </p:nvCxnSpPr>
-        <p:spPr>
-          <a:xfrm>
-            <a:off x="7266432" y="1925677"/>
-            <a:ext cx="103632" cy="128176"/>
-          </a:xfrm>
-          <a:prstGeom prst="line">
-            <a:avLst/>
-          </a:prstGeom>
-          <a:ln w="25400">
-            <a:solidFill>
-              <a:srgbClr val="8EDBD4"/>
-            </a:solidFill>
-          </a:ln>
-          <a:effectLst/>
-        </p:spPr>
-      </p:cxnSp>
-      <p:cxnSp>
-        <p:nvCxnSpPr>
-          <p:cNvPr id="19" name="line18" descr="sci-ppt:C2-E03-018"/>
-          <p:cNvCxnSpPr/>
-          <p:nvPr/>
-        </p:nvCxnSpPr>
-        <p:spPr>
-          <a:xfrm>
-            <a:off x="7370064" y="2053853"/>
-            <a:ext cx="103632" cy="137905"/>
-          </a:xfrm>
-          <a:prstGeom prst="line">
-            <a:avLst/>
-          </a:prstGeom>
-          <a:ln w="25400">
-            <a:solidFill>
-              <a:srgbClr val="8EDBD4"/>
-            </a:solidFill>
-          </a:ln>
-          <a:effectLst/>
-        </p:spPr>
-      </p:cxnSp>
-      <p:cxnSp>
-        <p:nvCxnSpPr>
-          <p:cNvPr id="20" name="line19" descr="sci-ppt:C2-E03-019"/>
-          <p:cNvCxnSpPr/>
-          <p:nvPr/>
-        </p:nvCxnSpPr>
-        <p:spPr>
-          <a:xfrm>
-            <a:off x="7473696" y="2191758"/>
-            <a:ext cx="103632" cy="144285"/>
-          </a:xfrm>
-          <a:prstGeom prst="line">
-            <a:avLst/>
-          </a:prstGeom>
-          <a:ln w="25400">
-            <a:solidFill>
-              <a:srgbClr val="8EDBD4"/>
-            </a:solidFill>
-          </a:ln>
-          <a:effectLst/>
-        </p:spPr>
-      </p:cxnSp>
-      <p:cxnSp>
-        <p:nvCxnSpPr>
-          <p:cNvPr id="21" name="line20" descr="sci-ppt:C2-E03-020"/>
-          <p:cNvCxnSpPr/>
-          <p:nvPr/>
-        </p:nvCxnSpPr>
-        <p:spPr>
-          <a:xfrm>
-            <a:off x="7577328" y="2336043"/>
-            <a:ext cx="103632" cy="147392"/>
-          </a:xfrm>
-          <a:prstGeom prst="line">
-            <a:avLst/>
-          </a:prstGeom>
-          <a:ln w="25400">
-            <a:solidFill>
-              <a:srgbClr val="8EDBD4"/>
-            </a:solidFill>
-          </a:ln>
-          <a:effectLst/>
-        </p:spPr>
-      </p:cxnSp>
-      <p:cxnSp>
-        <p:nvCxnSpPr>
-          <p:cNvPr id="22" name="line21" descr="sci-ppt:C2-E03-021"/>
-          <p:cNvCxnSpPr/>
-          <p:nvPr/>
-        </p:nvCxnSpPr>
-        <p:spPr>
-          <a:xfrm>
-            <a:off x="7680960" y="2483435"/>
-            <a:ext cx="103632" cy="147417"/>
-          </a:xfrm>
-          <a:prstGeom prst="line">
-            <a:avLst/>
-          </a:prstGeom>
-          <a:ln w="25400">
-            <a:solidFill>
-              <a:srgbClr val="8EDBD4"/>
-            </a:solidFill>
-          </a:ln>
-          <a:effectLst/>
-        </p:spPr>
-      </p:cxnSp>
-      <p:cxnSp>
-        <p:nvCxnSpPr>
-          <p:cNvPr id="23" name="line22" descr="sci-ppt:C2-E03-022"/>
-          <p:cNvCxnSpPr/>
-          <p:nvPr/>
-        </p:nvCxnSpPr>
-        <p:spPr>
-          <a:xfrm>
-            <a:off x="7784592" y="2630852"/>
-            <a:ext cx="103632" cy="144651"/>
-          </a:xfrm>
-          <a:prstGeom prst="line">
-            <a:avLst/>
-          </a:prstGeom>
-          <a:ln w="25400">
-            <a:solidFill>
-              <a:srgbClr val="8EDBD4"/>
-            </a:solidFill>
-          </a:ln>
-          <a:effectLst/>
-        </p:spPr>
-      </p:cxnSp>
-      <p:cxnSp>
-        <p:nvCxnSpPr>
-          <p:cNvPr id="24" name="line23" descr="sci-ppt:C2-E03-023"/>
-          <p:cNvCxnSpPr/>
-          <p:nvPr/>
-        </p:nvCxnSpPr>
-        <p:spPr>
-          <a:xfrm>
-            <a:off x="7888224" y="2775503"/>
-            <a:ext cx="103632" cy="139464"/>
-          </a:xfrm>
-          <a:prstGeom prst="line">
-            <a:avLst/>
-          </a:prstGeom>
-          <a:ln w="25400">
-            <a:solidFill>
-              <a:srgbClr val="8EDBD4"/>
-            </a:solidFill>
-          </a:ln>
-          <a:effectLst/>
-        </p:spPr>
-      </p:cxnSp>
-      <p:cxnSp>
-        <p:nvCxnSpPr>
-          <p:cNvPr id="25" name="line24" descr="sci-ppt:C2-E03-024"/>
-          <p:cNvCxnSpPr/>
-          <p:nvPr/>
-        </p:nvCxnSpPr>
-        <p:spPr>
-          <a:xfrm>
-            <a:off x="7991856" y="2914967"/>
-            <a:ext cx="103632" cy="132274"/>
-          </a:xfrm>
-          <a:prstGeom prst="line">
-            <a:avLst/>
-          </a:prstGeom>
-          <a:ln w="25400">
-            <a:solidFill>
-              <a:srgbClr val="8EDBD4"/>
-            </a:solidFill>
-          </a:ln>
-          <a:effectLst/>
-        </p:spPr>
-      </p:cxnSp>
-      <p:cxnSp>
-        <p:nvCxnSpPr>
-          <p:cNvPr id="26" name="line25" descr="sci-ppt:C2-E03-025"/>
-          <p:cNvCxnSpPr/>
-          <p:nvPr/>
-        </p:nvCxnSpPr>
-        <p:spPr>
-          <a:xfrm>
-            <a:off x="8095488" y="3047241"/>
-            <a:ext cx="103632" cy="123526"/>
-          </a:xfrm>
-          <a:prstGeom prst="line">
-            <a:avLst/>
-          </a:prstGeom>
-          <a:ln w="25400">
-            <a:solidFill>
-              <a:srgbClr val="8EDBD4"/>
-            </a:solidFill>
-          </a:ln>
-          <a:effectLst/>
-        </p:spPr>
-      </p:cxnSp>
-      <p:cxnSp>
-        <p:nvCxnSpPr>
-          <p:cNvPr id="27" name="line26" descr="sci-ppt:C2-E03-026"/>
-          <p:cNvCxnSpPr/>
-          <p:nvPr/>
-        </p:nvCxnSpPr>
-        <p:spPr>
-          <a:xfrm>
-            <a:off x="8199120" y="3170767"/>
-            <a:ext cx="103632" cy="113666"/>
-          </a:xfrm>
-          <a:prstGeom prst="line">
-            <a:avLst/>
-          </a:prstGeom>
-          <a:ln w="25400">
-            <a:solidFill>
-              <a:srgbClr val="8EDBD4"/>
-            </a:solidFill>
-          </a:ln>
-          <a:effectLst/>
-        </p:spPr>
-      </p:cxnSp>
-      <p:cxnSp>
-        <p:nvCxnSpPr>
-          <p:cNvPr id="28" name="line27" descr="sci-ppt:C2-E03-027"/>
-          <p:cNvCxnSpPr/>
-          <p:nvPr/>
-        </p:nvCxnSpPr>
-        <p:spPr>
-          <a:xfrm>
-            <a:off x="8302752" y="3284433"/>
-            <a:ext cx="103632" cy="103123"/>
-          </a:xfrm>
-          <a:prstGeom prst="line">
-            <a:avLst/>
-          </a:prstGeom>
-          <a:ln w="25400">
-            <a:solidFill>
-              <a:srgbClr val="8EDBD4"/>
-            </a:solidFill>
-          </a:ln>
-          <a:effectLst/>
-        </p:spPr>
-      </p:cxnSp>
-      <p:cxnSp>
-        <p:nvCxnSpPr>
-          <p:cNvPr id="29" name="line28" descr="sci-ppt:C2-E03-028"/>
-          <p:cNvCxnSpPr/>
-          <p:nvPr/>
-        </p:nvCxnSpPr>
-        <p:spPr>
-          <a:xfrm>
-            <a:off x="8406384" y="3387556"/>
-            <a:ext cx="103632" cy="92287"/>
-          </a:xfrm>
-          <a:prstGeom prst="line">
-            <a:avLst/>
-          </a:prstGeom>
-          <a:ln w="25400">
-            <a:solidFill>
-              <a:srgbClr val="8EDBD4"/>
-            </a:solidFill>
-          </a:ln>
-          <a:effectLst/>
-        </p:spPr>
-      </p:cxnSp>
-      <p:cxnSp>
-        <p:nvCxnSpPr>
-          <p:cNvPr id="30" name="line29" descr="sci-ppt:C2-E03-029"/>
-          <p:cNvCxnSpPr/>
-          <p:nvPr/>
-        </p:nvCxnSpPr>
-        <p:spPr>
-          <a:xfrm>
-            <a:off x="8510016" y="3479843"/>
-            <a:ext cx="103632" cy="81502"/>
-          </a:xfrm>
-          <a:prstGeom prst="line">
-            <a:avLst/>
-          </a:prstGeom>
-          <a:ln w="25400">
-            <a:solidFill>
-              <a:srgbClr val="8EDBD4"/>
-            </a:solidFill>
-          </a:ln>
-          <a:effectLst/>
-        </p:spPr>
-      </p:cxnSp>
-      <p:cxnSp>
-        <p:nvCxnSpPr>
-          <p:cNvPr id="31" name="line30" descr="sci-ppt:C2-E03-030"/>
-          <p:cNvCxnSpPr/>
-          <p:nvPr/>
-        </p:nvCxnSpPr>
-        <p:spPr>
-          <a:xfrm>
-            <a:off x="8613648" y="3561345"/>
-            <a:ext cx="103632" cy="71053"/>
-          </a:xfrm>
-          <a:prstGeom prst="line">
-            <a:avLst/>
-          </a:prstGeom>
-          <a:ln w="25400">
-            <a:solidFill>
-              <a:srgbClr val="8EDBD4"/>
-            </a:solidFill>
-          </a:ln>
-          <a:effectLst/>
-        </p:spPr>
-      </p:cxnSp>
-      <p:cxnSp>
-        <p:nvCxnSpPr>
-          <p:cNvPr id="32" name="line31" descr="sci-ppt:C2-E03-031"/>
-          <p:cNvCxnSpPr/>
-          <p:nvPr/>
-        </p:nvCxnSpPr>
-        <p:spPr>
-          <a:xfrm>
-            <a:off x="8717280" y="3632398"/>
-            <a:ext cx="103632" cy="61167"/>
-          </a:xfrm>
-          <a:prstGeom prst="line">
-            <a:avLst/>
-          </a:prstGeom>
-          <a:ln w="25400">
-            <a:solidFill>
-              <a:srgbClr val="8EDBD4"/>
-            </a:solidFill>
-          </a:ln>
-          <a:effectLst/>
-        </p:spPr>
-      </p:cxnSp>
-      <p:cxnSp>
-        <p:nvCxnSpPr>
-          <p:cNvPr id="33" name="line32" descr="sci-ppt:C2-E03-032"/>
-          <p:cNvCxnSpPr/>
-          <p:nvPr/>
-        </p:nvCxnSpPr>
-        <p:spPr>
-          <a:xfrm>
-            <a:off x="8820912" y="3693565"/>
-            <a:ext cx="103632" cy="52008"/>
-          </a:xfrm>
-          <a:prstGeom prst="line">
-            <a:avLst/>
-          </a:prstGeom>
-          <a:ln w="25400">
-            <a:solidFill>
-              <a:srgbClr val="8EDBD4"/>
-            </a:solidFill>
-          </a:ln>
-          <a:effectLst/>
-        </p:spPr>
-      </p:cxnSp>
-      <p:cxnSp>
-        <p:nvCxnSpPr>
-          <p:cNvPr id="34" name="line33" descr="sci-ppt:C2-E03-033"/>
-          <p:cNvCxnSpPr/>
-          <p:nvPr/>
-        </p:nvCxnSpPr>
-        <p:spPr>
-          <a:xfrm>
-            <a:off x="8924544" y="3745573"/>
-            <a:ext cx="103632" cy="43687"/>
-          </a:xfrm>
-          <a:prstGeom prst="line">
-            <a:avLst/>
-          </a:prstGeom>
-          <a:ln w="25400">
-            <a:solidFill>
-              <a:srgbClr val="8EDBD4"/>
-            </a:solidFill>
-          </a:ln>
-          <a:effectLst/>
-        </p:spPr>
-      </p:cxnSp>
-      <p:cxnSp>
-        <p:nvCxnSpPr>
-          <p:cNvPr id="35" name="line34" descr="sci-ppt:C2-E03-034"/>
-          <p:cNvCxnSpPr/>
-          <p:nvPr/>
-        </p:nvCxnSpPr>
-        <p:spPr>
-          <a:xfrm>
-            <a:off x="9028176" y="3789260"/>
-            <a:ext cx="103632" cy="36260"/>
-          </a:xfrm>
-          <a:prstGeom prst="line">
-            <a:avLst/>
-          </a:prstGeom>
-          <a:ln w="25400">
-            <a:solidFill>
-              <a:srgbClr val="8EDBD4"/>
-            </a:solidFill>
-          </a:ln>
-          <a:effectLst/>
-        </p:spPr>
-      </p:cxnSp>
-      <p:cxnSp>
-        <p:nvCxnSpPr>
-          <p:cNvPr id="36" name="line35" descr="sci-ppt:C2-E03-035"/>
-          <p:cNvCxnSpPr/>
-          <p:nvPr/>
-        </p:nvCxnSpPr>
-        <p:spPr>
-          <a:xfrm>
-            <a:off x="9131808" y="3825520"/>
-            <a:ext cx="103632" cy="29744"/>
-          </a:xfrm>
-          <a:prstGeom prst="line">
-            <a:avLst/>
-          </a:prstGeom>
-          <a:ln w="25400">
-            <a:solidFill>
-              <a:srgbClr val="8EDBD4"/>
-            </a:solidFill>
-          </a:ln>
-          <a:effectLst/>
-        </p:spPr>
-      </p:cxnSp>
-      <p:cxnSp>
-        <p:nvCxnSpPr>
-          <p:cNvPr id="37" name="line36" descr="sci-ppt:C2-E03-036"/>
-          <p:cNvCxnSpPr/>
-          <p:nvPr/>
-        </p:nvCxnSpPr>
-        <p:spPr>
-          <a:xfrm>
-            <a:off x="9235440" y="3855264"/>
-            <a:ext cx="103632" cy="24114"/>
-          </a:xfrm>
-          <a:prstGeom prst="line">
-            <a:avLst/>
-          </a:prstGeom>
-          <a:ln w="25400">
-            <a:solidFill>
-              <a:srgbClr val="8EDBD4"/>
-            </a:solidFill>
-          </a:ln>
-          <a:effectLst/>
-        </p:spPr>
-      </p:cxnSp>
-      <p:cxnSp>
-        <p:nvCxnSpPr>
-          <p:cNvPr id="38" name="line37" descr="sci-ppt:C2-E03-037"/>
-          <p:cNvCxnSpPr/>
-          <p:nvPr/>
-        </p:nvCxnSpPr>
-        <p:spPr>
-          <a:xfrm>
-            <a:off x="9339072" y="3879378"/>
-            <a:ext cx="103632" cy="19327"/>
-          </a:xfrm>
-          <a:prstGeom prst="line">
-            <a:avLst/>
-          </a:prstGeom>
-          <a:ln w="25400">
-            <a:solidFill>
-              <a:srgbClr val="8EDBD4"/>
-            </a:solidFill>
-          </a:ln>
-          <a:effectLst/>
-        </p:spPr>
-      </p:cxnSp>
-      <p:cxnSp>
-        <p:nvCxnSpPr>
-          <p:cNvPr id="39" name="line38" descr="sci-ppt:C2-E03-038"/>
-          <p:cNvCxnSpPr/>
-          <p:nvPr/>
-        </p:nvCxnSpPr>
-        <p:spPr>
-          <a:xfrm>
-            <a:off x="9442704" y="3898705"/>
-            <a:ext cx="103632" cy="15314"/>
-          </a:xfrm>
-          <a:prstGeom prst="line">
-            <a:avLst/>
-          </a:prstGeom>
-          <a:ln w="25400">
-            <a:solidFill>
-              <a:srgbClr val="8EDBD4"/>
-            </a:solidFill>
-          </a:ln>
-          <a:effectLst/>
-        </p:spPr>
-      </p:cxnSp>
-      <p:cxnSp>
-        <p:nvCxnSpPr>
-          <p:cNvPr id="40" name="line39" descr="sci-ppt:C2-E03-039"/>
-          <p:cNvCxnSpPr/>
-          <p:nvPr/>
-        </p:nvCxnSpPr>
-        <p:spPr>
-          <a:xfrm>
-            <a:off x="9546336" y="3914019"/>
-            <a:ext cx="103632" cy="11998"/>
-          </a:xfrm>
-          <a:prstGeom prst="line">
-            <a:avLst/>
-          </a:prstGeom>
-          <a:ln w="25400">
-            <a:solidFill>
-              <a:srgbClr val="8EDBD4"/>
-            </a:solidFill>
-          </a:ln>
-          <a:effectLst/>
-        </p:spPr>
-      </p:cxnSp>
-      <p:cxnSp>
-        <p:nvCxnSpPr>
-          <p:cNvPr id="41" name="line40" descr="sci-ppt:C2-E03-040"/>
-          <p:cNvCxnSpPr/>
-          <p:nvPr/>
-        </p:nvCxnSpPr>
-        <p:spPr>
-          <a:xfrm>
-            <a:off x="9649968" y="3926017"/>
-            <a:ext cx="103632" cy="9294"/>
-          </a:xfrm>
-          <a:prstGeom prst="line">
-            <a:avLst/>
-          </a:prstGeom>
-          <a:ln w="25400">
-            <a:solidFill>
-              <a:srgbClr val="8EDBD4"/>
-            </a:solidFill>
-          </a:ln>
-          <a:effectLst/>
-        </p:spPr>
-      </p:cxnSp>
-      <p:cxnSp>
-        <p:nvCxnSpPr>
-          <p:cNvPr id="42" name="line41" descr="sci-ppt:C2-E03-041"/>
-          <p:cNvCxnSpPr/>
-          <p:nvPr/>
-        </p:nvCxnSpPr>
-        <p:spPr>
-          <a:xfrm>
-            <a:off x="9753600" y="3935311"/>
-            <a:ext cx="103632" cy="7121"/>
-          </a:xfrm>
-          <a:prstGeom prst="line">
-            <a:avLst/>
-          </a:prstGeom>
-          <a:ln w="25400">
-            <a:solidFill>
-              <a:srgbClr val="8EDBD4"/>
-            </a:solidFill>
-          </a:ln>
-          <a:effectLst/>
-        </p:spPr>
-      </p:cxnSp>
-      <p:cxnSp>
-        <p:nvCxnSpPr>
-          <p:cNvPr id="43" name="line42" descr="sci-ppt:C2-E03-042"/>
-          <p:cNvCxnSpPr/>
-          <p:nvPr/>
-        </p:nvCxnSpPr>
-        <p:spPr>
-          <a:xfrm>
-            <a:off x="9857232" y="3942432"/>
-            <a:ext cx="103632" cy="5396"/>
-          </a:xfrm>
-          <a:prstGeom prst="line">
-            <a:avLst/>
-          </a:prstGeom>
-          <a:ln w="25400">
-            <a:solidFill>
-              <a:srgbClr val="8EDBD4"/>
-            </a:solidFill>
-          </a:ln>
-          <a:effectLst/>
-        </p:spPr>
-      </p:cxnSp>
-      <p:cxnSp>
-        <p:nvCxnSpPr>
-          <p:cNvPr id="44" name="line43" descr="sci-ppt:C2-E03-043"/>
-          <p:cNvCxnSpPr/>
-          <p:nvPr/>
-        </p:nvCxnSpPr>
-        <p:spPr>
-          <a:xfrm>
-            <a:off x="9960864" y="3947828"/>
-            <a:ext cx="103632" cy="4043"/>
-          </a:xfrm>
-          <a:prstGeom prst="line">
-            <a:avLst/>
-          </a:prstGeom>
-          <a:ln w="25400">
-            <a:solidFill>
-              <a:srgbClr val="8EDBD4"/>
-            </a:solidFill>
-          </a:ln>
-          <a:effectLst/>
-        </p:spPr>
-      </p:cxnSp>
-      <p:cxnSp>
-        <p:nvCxnSpPr>
-          <p:cNvPr id="45" name="line44" descr="sci-ppt:C2-E03-044"/>
-          <p:cNvCxnSpPr/>
-          <p:nvPr/>
-        </p:nvCxnSpPr>
-        <p:spPr>
-          <a:xfrm>
-            <a:off x="10064496" y="3951871"/>
-            <a:ext cx="103632" cy="2997"/>
-          </a:xfrm>
-          <a:prstGeom prst="line">
-            <a:avLst/>
-          </a:prstGeom>
-          <a:ln w="25400">
-            <a:solidFill>
-              <a:srgbClr val="8EDBD4"/>
-            </a:solidFill>
-          </a:ln>
-          <a:effectLst/>
-        </p:spPr>
-      </p:cxnSp>
-      <p:cxnSp>
-        <p:nvCxnSpPr>
-          <p:cNvPr id="46" name="line45" descr="sci-ppt:C2-E03-045"/>
-          <p:cNvCxnSpPr/>
-          <p:nvPr/>
-        </p:nvCxnSpPr>
-        <p:spPr>
-          <a:xfrm>
-            <a:off x="10168128" y="3954868"/>
-            <a:ext cx="103632" cy="2198"/>
-          </a:xfrm>
-          <a:prstGeom prst="line">
-            <a:avLst/>
-          </a:prstGeom>
-          <a:ln w="25400">
-            <a:solidFill>
-              <a:srgbClr val="8EDBD4"/>
-            </a:solidFill>
-          </a:ln>
-          <a:effectLst/>
-        </p:spPr>
-      </p:cxnSp>
-      <p:cxnSp>
-        <p:nvCxnSpPr>
-          <p:cNvPr id="47" name="line46" descr="sci-ppt:C2-E03-046"/>
-          <p:cNvCxnSpPr/>
-          <p:nvPr/>
-        </p:nvCxnSpPr>
-        <p:spPr>
-          <a:xfrm>
-            <a:off x="10271760" y="3957066"/>
-            <a:ext cx="103632" cy="1593"/>
-          </a:xfrm>
-          <a:prstGeom prst="line">
-            <a:avLst/>
-          </a:prstGeom>
-          <a:ln w="25400">
-            <a:solidFill>
-              <a:srgbClr val="8EDBD4"/>
-            </a:solidFill>
-          </a:ln>
-          <a:effectLst/>
-        </p:spPr>
-      </p:cxnSp>
-      <p:cxnSp>
-        <p:nvCxnSpPr>
-          <p:cNvPr id="48" name="line47" descr="sci-ppt:C2-E03-047"/>
-          <p:cNvCxnSpPr/>
-          <p:nvPr/>
-        </p:nvCxnSpPr>
-        <p:spPr>
-          <a:xfrm>
-            <a:off x="10375392" y="3958659"/>
-            <a:ext cx="103632" cy="1144"/>
-          </a:xfrm>
-          <a:prstGeom prst="line">
-            <a:avLst/>
-          </a:prstGeom>
-          <a:ln w="25400">
-            <a:solidFill>
-              <a:srgbClr val="8EDBD4"/>
-            </a:solidFill>
-          </a:ln>
-          <a:effectLst/>
-        </p:spPr>
-      </p:cxnSp>
-      <p:cxnSp>
-        <p:nvCxnSpPr>
-          <p:cNvPr id="49" name="line48" descr="sci-ppt:C2-E03-048"/>
-          <p:cNvCxnSpPr/>
-          <p:nvPr/>
-        </p:nvCxnSpPr>
-        <p:spPr>
-          <a:xfrm>
-            <a:off x="10479024" y="3959803"/>
-            <a:ext cx="103632" cy="812"/>
-          </a:xfrm>
-          <a:prstGeom prst="line">
-            <a:avLst/>
-          </a:prstGeom>
-          <a:ln w="25400">
-            <a:solidFill>
-              <a:srgbClr val="8EDBD4"/>
-            </a:solidFill>
-          </a:ln>
-          <a:effectLst/>
-        </p:spPr>
-      </p:cxnSp>
-      <p:cxnSp>
-        <p:nvCxnSpPr>
-          <p:cNvPr id="50" name="line49" descr="sci-ppt:C2-E03-049"/>
-          <p:cNvCxnSpPr/>
-          <p:nvPr/>
-        </p:nvCxnSpPr>
-        <p:spPr>
-          <a:xfrm>
-            <a:off x="10582656" y="3960615"/>
-            <a:ext cx="103632" cy="570"/>
-          </a:xfrm>
-          <a:prstGeom prst="line">
-            <a:avLst/>
-          </a:prstGeom>
-          <a:ln w="25400">
-            <a:solidFill>
-              <a:srgbClr val="8EDBD4"/>
-            </a:solidFill>
-          </a:ln>
-          <a:effectLst/>
-        </p:spPr>
-      </p:cxnSp>
-      <p:cxnSp>
-        <p:nvCxnSpPr>
-          <p:cNvPr id="51" name="line50" descr="sci-ppt:C2-E03-050"/>
-          <p:cNvCxnSpPr/>
-          <p:nvPr/>
-        </p:nvCxnSpPr>
-        <p:spPr>
-          <a:xfrm>
-            <a:off x="10686288" y="3961185"/>
-            <a:ext cx="103632" cy="397"/>
-          </a:xfrm>
-          <a:prstGeom prst="line">
-            <a:avLst/>
-          </a:prstGeom>
-          <a:ln w="25400">
-            <a:solidFill>
-              <a:srgbClr val="8EDBD4"/>
-            </a:solidFill>
-          </a:ln>
-          <a:effectLst/>
-        </p:spPr>
-      </p:cxnSp>
-      <p:sp>
-        <p:nvSpPr>
-          <p:cNvPr id="52" name="text51" descr="sci-ppt:C2-E03-051"/>
-          <p:cNvSpPr txBox="1"/>
-          <p:nvPr/>
-        </p:nvSpPr>
-        <p:spPr>
-          <a:xfrm>
-            <a:off x="7254240" y="1036320"/>
-            <a:ext cx="4267200" cy="340156"/>
-          </a:xfrm>
-          <a:prstGeom prst="rect">
-            <a:avLst/>
-          </a:prstGeom>
-          <a:noFill/>
-          <a:effectLst/>
-        </p:spPr>
-        <p:txBody>
-          <a:bodyPr wrap="none" lIns="27432" rIns="27432" tIns="18288" bIns="18288" anchor="ctr">
-            <a:spAutoFit/>
-          </a:bodyPr>
-          <a:lstStyle/>
+              <a:t>f_geo = 1 − exp(−2 bₐ² / w²):  the outer annuli are removed from</a:t>
+            </a:r>
+          </a:p>
           <a:p>
             <a:pPr algn="l">
               <a:spcAft>
@@ -4337,66 +5884,36 @@
               </a:spcAft>
             </a:pPr>
             <a:r>
-              <a:rPr sz="1728" b="0" i="0">
+              <a:rPr sz="1300" b="1" i="0">
                 <a:solidFill>
                   <a:srgbClr val="E7F0F3"/>
                 </a:solidFill>
                 <a:latin typeface="Arial"/>
               </a:rPr>
-              <a:t>Gaussian profile (prescribed)</a:t>
-            </a:r>
-          </a:p>
-        </p:txBody>
-      </p:sp>
-      <p:sp>
-        <p:nvSpPr>
-          <p:cNvPr id="53" name="ellipse52" descr="sci-ppt:C2-E03-052"/>
-          <p:cNvSpPr/>
-          <p:nvPr/>
-        </p:nvSpPr>
-        <p:spPr>
-          <a:xfrm>
-            <a:off x="2072640" y="2011680"/>
-            <a:ext cx="1219200" cy="1219200"/>
-          </a:xfrm>
-          <a:prstGeom prst="ellipse">
+              <a:t>the useful energy.</a:t>
+            </a:r>
+          </a:p>
+        </p:txBody>
+      </p:sp>
+      <p:sp>
+        <p:nvSpPr>
+          <p:cNvPr id="74" name="C2-E03 text 72" descr="sci-ppt:o072"/>
+          <p:cNvSpPr txBox="1"/>
+          <p:nvPr/>
+        </p:nvSpPr>
+        <p:spPr>
+          <a:xfrm>
+            <a:off x="320040" y="6510528"/>
+            <a:ext cx="11521440" cy="200660"/>
+          </a:xfrm>
+          <a:prstGeom prst="rect">
             <a:avLst/>
           </a:prstGeom>
           <a:noFill/>
-          <a:ln w="21590">
-            <a:solidFill>
-              <a:srgbClr val="F6BC77"/>
-            </a:solidFill>
-          </a:ln>
-          <a:effectLst/>
-        </p:spPr>
-        <p:txBody>
-          <a:bodyPr rtlCol="0" anchor="ctr"/>
-          <a:lstStyle/>
-          <a:p>
-            <a:pPr algn="ctr"/>
-          </a:p>
-        </p:txBody>
-      </p:sp>
-      <p:sp>
-        <p:nvSpPr>
-          <p:cNvPr id="54" name="text53" descr="sci-ppt:C2-E03-053"/>
-          <p:cNvSpPr txBox="1"/>
-          <p:nvPr/>
-        </p:nvSpPr>
-        <p:spPr>
-          <a:xfrm>
-            <a:off x="1036320" y="853440"/>
-            <a:ext cx="4267200" cy="359054"/>
-          </a:xfrm>
-          <a:prstGeom prst="rect">
-            <a:avLst/>
-          </a:prstGeom>
-          <a:noFill/>
-          <a:effectLst/>
-        </p:spPr>
-        <p:txBody>
-          <a:bodyPr wrap="none" lIns="27432" rIns="27432" tIns="18288" bIns="18288" anchor="ctr">
+          <a:effectLst/>
+        </p:spPr>
+        <p:txBody>
+          <a:bodyPr wrap="none" lIns="18288" rIns="18288" tIns="18288" bIns="18288" anchor="t">
             <a:spAutoFit/>
           </a:bodyPr>
           <a:lstStyle/>
@@ -4407,333 +5924,13 @@
               </a:spcAft>
             </a:pPr>
             <a:r>
-              <a:rPr sz="1823" b="0" i="0">
-                <a:solidFill>
-                  <a:srgbClr val="F6BC77"/>
-                </a:solidFill>
-                <a:latin typeface="Arial"/>
-              </a:rPr>
-              <a:t>Centered aperture b_a</a:t>
-            </a:r>
-          </a:p>
-        </p:txBody>
-      </p:sp>
-      <p:sp>
-        <p:nvSpPr>
-          <p:cNvPr id="55" name="text54" descr="sci-ppt:C2-E03-054"/>
-          <p:cNvSpPr txBox="1"/>
-          <p:nvPr/>
-        </p:nvSpPr>
-        <p:spPr>
-          <a:xfrm>
-            <a:off x="365760" y="4974336"/>
-            <a:ext cx="5547360" cy="321259"/>
-          </a:xfrm>
-          <a:prstGeom prst="rect">
-            <a:avLst/>
-          </a:prstGeom>
-          <a:noFill/>
-          <a:effectLst/>
-        </p:spPr>
-        <p:txBody>
-          <a:bodyPr wrap="none" lIns="27432" rIns="27432" tIns="18288" bIns="18288" anchor="ctr">
-            <a:spAutoFit/>
-          </a:bodyPr>
-          <a:lstStyle/>
-          <a:p>
-            <a:pPr algn="l">
-              <a:spcAft>
-                <a:spcPts val="0"/>
-              </a:spcAft>
-            </a:pPr>
-            <a:r>
-              <a:rPr sz="1632" b="0" i="0">
-                <a:solidFill>
-                  <a:srgbClr val="E7F0F3"/>
-                </a:solidFill>
-                <a:latin typeface="Arial"/>
-              </a:rPr>
-              <a:t>b_a: absorber aperture edge</a:t>
-            </a:r>
-          </a:p>
-        </p:txBody>
-      </p:sp>
-      <p:sp>
-        <p:nvSpPr>
-          <p:cNvPr id="56" name="text55" descr="sci-ppt:C2-E03-055"/>
-          <p:cNvSpPr txBox="1"/>
-          <p:nvPr/>
-        </p:nvSpPr>
-        <p:spPr>
-          <a:xfrm>
-            <a:off x="365760" y="5266944"/>
-            <a:ext cx="5547360" cy="321259"/>
-          </a:xfrm>
-          <a:prstGeom prst="rect">
-            <a:avLst/>
-          </a:prstGeom>
-          <a:noFill/>
-          <a:effectLst/>
-        </p:spPr>
-        <p:txBody>
-          <a:bodyPr wrap="none" lIns="27432" rIns="27432" tIns="18288" bIns="18288" anchor="ctr">
-            <a:spAutoFit/>
-          </a:bodyPr>
-          <a:lstStyle/>
-          <a:p>
-            <a:pPr algn="l">
-              <a:spcAft>
-                <a:spcPts val="0"/>
-              </a:spcAft>
-            </a:pPr>
-            <a:r>
-              <a:rPr sz="1632" b="0" i="0">
-                <a:solidFill>
-                  <a:srgbClr val="E7F0F3"/>
-                </a:solidFill>
-                <a:latin typeface="Arial"/>
-              </a:rPr>
-              <a:t>r, F(r): intercepted annuli</a:t>
-            </a:r>
-          </a:p>
-        </p:txBody>
-      </p:sp>
-      <p:sp>
-        <p:nvSpPr>
-          <p:cNvPr id="57" name="text56" descr="sci-ppt:C2-E03-056"/>
-          <p:cNvSpPr txBox="1"/>
-          <p:nvPr/>
-        </p:nvSpPr>
-        <p:spPr>
-          <a:xfrm>
-            <a:off x="365760" y="5559552"/>
-            <a:ext cx="5547360" cy="321259"/>
-          </a:xfrm>
-          <a:prstGeom prst="rect">
-            <a:avLst/>
-          </a:prstGeom>
-          <a:noFill/>
-          <a:effectLst/>
-        </p:spPr>
-        <p:txBody>
-          <a:bodyPr wrap="none" lIns="27432" rIns="27432" tIns="18288" bIns="18288" anchor="ctr">
-            <a:spAutoFit/>
-          </a:bodyPr>
-          <a:lstStyle/>
-          <a:p>
-            <a:pPr algn="l">
-              <a:spcAft>
-                <a:spcPts val="0"/>
-              </a:spcAft>
-            </a:pPr>
-            <a:r>
-              <a:rPr sz="1632" b="0" i="0">
-                <a:solidFill>
-                  <a:srgbClr val="E7F0F3"/>
-                </a:solidFill>
-                <a:latin typeface="Arial"/>
-              </a:rPr>
-              <a:t>f_geo: intercepted fraction</a:t>
-            </a:r>
-          </a:p>
-        </p:txBody>
-      </p:sp>
-      <p:sp>
-        <p:nvSpPr>
-          <p:cNvPr id="58" name="text57" descr="sci-ppt:C2-E03-057"/>
-          <p:cNvSpPr txBox="1"/>
-          <p:nvPr/>
-        </p:nvSpPr>
-        <p:spPr>
-          <a:xfrm>
-            <a:off x="6156960" y="4974336"/>
-            <a:ext cx="5547360" cy="321259"/>
-          </a:xfrm>
-          <a:prstGeom prst="rect">
-            <a:avLst/>
-          </a:prstGeom>
-          <a:noFill/>
-          <a:effectLst/>
-        </p:spPr>
-        <p:txBody>
-          <a:bodyPr wrap="none" lIns="27432" rIns="27432" tIns="18288" bIns="18288" anchor="ctr">
-            <a:spAutoFit/>
-          </a:bodyPr>
-          <a:lstStyle/>
-          <a:p>
-            <a:pPr algn="l">
-              <a:spcAft>
-                <a:spcPts val="0"/>
-              </a:spcAft>
-            </a:pPr>
-            <a:r>
-              <a:rPr sz="1632" b="0" i="0">
-                <a:solidFill>
-                  <a:srgbClr val="E7F0F3"/>
-                </a:solidFill>
-                <a:latin typeface="Arial"/>
-              </a:rPr>
-              <a:t>w: beam radius</a:t>
-            </a:r>
-          </a:p>
-        </p:txBody>
-      </p:sp>
-      <p:sp>
-        <p:nvSpPr>
-          <p:cNvPr id="59" name="text58" descr="sci-ppt:C2-E03-058"/>
-          <p:cNvSpPr txBox="1"/>
-          <p:nvPr/>
-        </p:nvSpPr>
-        <p:spPr>
-          <a:xfrm>
-            <a:off x="6156960" y="5266944"/>
-            <a:ext cx="5547360" cy="321259"/>
-          </a:xfrm>
-          <a:prstGeom prst="rect">
-            <a:avLst/>
-          </a:prstGeom>
-          <a:noFill/>
-          <a:effectLst/>
-        </p:spPr>
-        <p:txBody>
-          <a:bodyPr wrap="none" lIns="27432" rIns="27432" tIns="18288" bIns="18288" anchor="ctr">
-            <a:spAutoFit/>
-          </a:bodyPr>
-          <a:lstStyle/>
-          <a:p>
-            <a:pPr algn="l">
-              <a:spcAft>
-                <a:spcPts val="0"/>
-              </a:spcAft>
-            </a:pPr>
-            <a:r>
-              <a:rPr sz="1632" b="0" i="0">
-                <a:solidFill>
-                  <a:srgbClr val="E7F0F3"/>
-                </a:solidFill>
-                <a:latin typeface="Arial"/>
-              </a:rPr>
-              <a:t>E_L: full incident energy</a:t>
-            </a:r>
-          </a:p>
-        </p:txBody>
-      </p:sp>
-      <p:sp>
-        <p:nvSpPr>
-          <p:cNvPr id="60" name="text59" descr="sci-ppt:C2-E03-059"/>
-          <p:cNvSpPr txBox="1"/>
-          <p:nvPr/>
-        </p:nvSpPr>
-        <p:spPr>
-          <a:xfrm>
-            <a:off x="6156960" y="5559552"/>
-            <a:ext cx="5547360" cy="321259"/>
-          </a:xfrm>
-          <a:prstGeom prst="rect">
-            <a:avLst/>
-          </a:prstGeom>
-          <a:noFill/>
-          <a:effectLst/>
-        </p:spPr>
-        <p:txBody>
-          <a:bodyPr wrap="none" lIns="27432" rIns="27432" tIns="18288" bIns="18288" anchor="ctr">
-            <a:spAutoFit/>
-          </a:bodyPr>
-          <a:lstStyle/>
-          <a:p>
-            <a:pPr algn="l">
-              <a:spcAft>
-                <a:spcPts val="0"/>
-              </a:spcAft>
-            </a:pPr>
-            <a:r>
-              <a:rPr sz="1632" b="0" i="0">
-                <a:solidFill>
-                  <a:srgbClr val="E7F0F3"/>
-                </a:solidFill>
-                <a:latin typeface="Arial"/>
-              </a:rPr>
-              <a:t>π: annulus geometry</a:t>
-            </a:r>
-          </a:p>
-        </p:txBody>
-      </p:sp>
-      <p:sp>
-        <p:nvSpPr>
-          <p:cNvPr id="61" name="text60" descr="sci-ppt:C2-E03-060"/>
-          <p:cNvSpPr txBox="1"/>
-          <p:nvPr/>
-        </p:nvSpPr>
-        <p:spPr>
-          <a:xfrm>
-            <a:off x="365760" y="6278880"/>
-            <a:ext cx="11277600" cy="302361"/>
-          </a:xfrm>
-          <a:prstGeom prst="rect">
-            <a:avLst/>
-          </a:prstGeom>
-          <a:noFill/>
-          <a:effectLst/>
-        </p:spPr>
-        <p:txBody>
-          <a:bodyPr wrap="none" lIns="27432" rIns="27432" tIns="18288" bIns="18288" anchor="ctr">
-            <a:spAutoFit/>
-          </a:bodyPr>
-          <a:lstStyle/>
-          <a:p>
-            <a:pPr algn="l">
-              <a:spcAft>
-                <a:spcPts val="0"/>
-              </a:spcAft>
-            </a:pPr>
-            <a:r>
-              <a:rPr sz="1536" b="0" i="0">
+              <a:rPr sz="1000" b="0" i="0">
                 <a:solidFill>
                   <a:srgbClr val="B4C7D2"/>
                 </a:solidFill>
                 <a:latin typeface="Arial"/>
               </a:rPr>
-              <a:t>b_a → 0 gives no interception</a:t>
-            </a:r>
-          </a:p>
-        </p:txBody>
-      </p:sp>
-      <p:sp>
-        <p:nvSpPr>
-          <p:cNvPr id="62" name="text61" descr="sci-ppt:C2-E03-061"/>
-          <p:cNvSpPr txBox="1"/>
-          <p:nvPr/>
-        </p:nvSpPr>
-        <p:spPr>
-          <a:xfrm>
-            <a:off x="365760" y="6571488"/>
-            <a:ext cx="11277600" cy="302361"/>
-          </a:xfrm>
-          <a:prstGeom prst="rect">
-            <a:avLst/>
-          </a:prstGeom>
-          <a:noFill/>
-          <a:effectLst/>
-        </p:spPr>
-        <p:txBody>
-          <a:bodyPr wrap="none" lIns="27432" rIns="27432" tIns="18288" bIns="18288" anchor="ctr">
-            <a:spAutoFit/>
-          </a:bodyPr>
-          <a:lstStyle/>
-          <a:p>
-            <a:pPr algn="l">
-              <a:spcAft>
-                <a:spcPts val="0"/>
-              </a:spcAft>
-            </a:pPr>
-            <a:r>
-              <a:rPr sz="1536" b="0" i="0">
-                <a:solidFill>
-                  <a:srgbClr val="B4C7D2"/>
-                </a:solidFill>
-                <a:latin typeface="Arial"/>
-              </a:rPr>
-              <a:t>b_a ≫ w captures nearly all beam energy</a:t>
+              <a:t>Interception fraction of Eq. C2-E03; bₐ = w/2 gives the 0.3935 used later.</a:t>
             </a:r>
           </a:p>
         </p:txBody>
